--- a/slides/week2.pptx
+++ b/slides/week2.pptx
@@ -5,7 +5,7 @@
     <p:sldMasterId id="2147483648" r:id="rId1"/>
   </p:sldMasterIdLst>
   <p:notesMasterIdLst>
-    <p:notesMasterId r:id="rId18"/>
+    <p:notesMasterId r:id="rId19"/>
   </p:notesMasterIdLst>
   <p:sldIdLst>
     <p:sldId id="256" r:id="rId2"/>
@@ -22,8 +22,9 @@
     <p:sldId id="270" r:id="rId13"/>
     <p:sldId id="271" r:id="rId14"/>
     <p:sldId id="273" r:id="rId15"/>
-    <p:sldId id="272" r:id="rId16"/>
-    <p:sldId id="276" r:id="rId17"/>
+    <p:sldId id="277" r:id="rId16"/>
+    <p:sldId id="272" r:id="rId17"/>
+    <p:sldId id="276" r:id="rId18"/>
   </p:sldIdLst>
   <p:sldSz cx="12192000" cy="6858000"/>
   <p:notesSz cx="6858000" cy="9144000"/>
@@ -212,7 +213,7 @@
           <a:p>
             <a:fld id="{D7A422DF-4847-4D6E-BB97-9B75D56F5D74}" type="datetimeFigureOut">
               <a:rPr lang="it-IT" smtClean="0"/>
-              <a:t>11/07/2026</a:t>
+              <a:t>13/07/2026</a:t>
             </a:fld>
             <a:endParaRPr lang="it-IT"/>
           </a:p>
@@ -508,8 +509,8 @@
         </p:nvSpPr>
         <p:spPr/>
       </p:sp>
-      <mc:AlternateContent xmlns:mc="http://schemas.openxmlformats.org/markup-compatibility/2006">
-        <mc:Choice xmlns:a14="http://schemas.microsoft.com/office/drawing/2010/main" Requires="a14">
+      <mc:AlternateContent xmlns:mc="http://schemas.openxmlformats.org/markup-compatibility/2006" xmlns:a14="http://schemas.microsoft.com/office/drawing/2010/main">
+        <mc:Choice Requires="a14">
           <p:sp>
             <p:nvSpPr>
               <p:cNvPr id="3" name="Segnaposto note 2"/>
@@ -856,7 +857,7 @@
                         <a:solidFill>
                           <a:schemeClr val="tx1"/>
                         </a:solidFill>
-                        <a:latin typeface="+mn-lt"/>
+                        <a:latin typeface="Cambria Math" panose="02040503050406030204" pitchFamily="18" charset="0"/>
                         <a:ea typeface="+mn-ea"/>
                         <a:cs typeface="+mn-cs"/>
                       </a:rPr>
@@ -867,7 +868,7 @@
                         <a:solidFill>
                           <a:schemeClr val="tx1"/>
                         </a:solidFill>
-                        <a:latin typeface="+mn-lt"/>
+                        <a:latin typeface="Cambria Math" panose="02040503050406030204" pitchFamily="18" charset="0"/>
                         <a:ea typeface="+mn-ea"/>
                         <a:cs typeface="+mn-cs"/>
                       </a:rPr>
@@ -894,7 +895,7 @@
                             <a:solidFill>
                               <a:schemeClr val="tx1"/>
                             </a:solidFill>
-                            <a:latin typeface="+mn-lt"/>
+                            <a:latin typeface="Cambria Math" panose="02040503050406030204" pitchFamily="18" charset="0"/>
                             <a:ea typeface="+mn-ea"/>
                             <a:cs typeface="+mn-cs"/>
                           </a:rPr>
@@ -906,7 +907,7 @@
                             <a:solidFill>
                               <a:schemeClr val="tx1"/>
                             </a:solidFill>
-                            <a:latin typeface="+mn-lt"/>
+                            <a:latin typeface="Cambria Math" panose="02040503050406030204" pitchFamily="18" charset="0"/>
                             <a:ea typeface="+mn-ea"/>
                             <a:cs typeface="+mn-cs"/>
                           </a:rPr>
@@ -919,7 +920,7 @@
                             <a:solidFill>
                               <a:schemeClr val="tx1"/>
                             </a:solidFill>
-                            <a:latin typeface="+mn-lt"/>
+                            <a:latin typeface="Cambria Math" panose="02040503050406030204" pitchFamily="18" charset="0"/>
                             <a:ea typeface="+mn-ea"/>
                             <a:cs typeface="+mn-cs"/>
                           </a:rPr>
@@ -994,7 +995,7 @@
             </p:txBody>
           </p:sp>
         </mc:Choice>
-        <mc:Fallback>
+        <mc:Fallback xmlns="">
           <p:sp>
             <p:nvSpPr>
               <p:cNvPr id="3" name="Segnaposto note 2"/>
@@ -1801,6 +1802,114 @@
         <p:cNvPr id="1" name="">
           <a:extLst>
             <a:ext uri="{FF2B5EF4-FFF2-40B4-BE49-F238E27FC236}">
+              <a16:creationId xmlns:a16="http://schemas.microsoft.com/office/drawing/2014/main" id="{17287265-1968-9F40-DCD4-B05DA41FDA1B}"/>
+            </a:ext>
+          </a:extLst>
+        </p:cNvPr>
+        <p:cNvGrpSpPr/>
+        <p:nvPr/>
+      </p:nvGrpSpPr>
+      <p:grpSpPr>
+        <a:xfrm>
+          <a:off x="0" y="0"/>
+          <a:ext cx="0" cy="0"/>
+          <a:chOff x="0" y="0"/>
+          <a:chExt cx="0" cy="0"/>
+        </a:xfrm>
+      </p:grpSpPr>
+      <p:sp>
+        <p:nvSpPr>
+          <p:cNvPr id="2" name="Segnaposto immagine diapositiva 1">
+            <a:extLst>
+              <a:ext uri="{FF2B5EF4-FFF2-40B4-BE49-F238E27FC236}">
+                <a16:creationId xmlns:a16="http://schemas.microsoft.com/office/drawing/2014/main" id="{DDB6090C-73C0-0AE1-5D15-A044ED5FE11C}"/>
+              </a:ext>
+            </a:extLst>
+          </p:cNvPr>
+          <p:cNvSpPr>
+            <a:spLocks noGrp="1" noRot="1" noChangeAspect="1"/>
+          </p:cNvSpPr>
+          <p:nvPr>
+            <p:ph type="sldImg"/>
+          </p:nvPr>
+        </p:nvSpPr>
+        <p:spPr/>
+      </p:sp>
+      <p:sp>
+        <p:nvSpPr>
+          <p:cNvPr id="3" name="Segnaposto note 2">
+            <a:extLst>
+              <a:ext uri="{FF2B5EF4-FFF2-40B4-BE49-F238E27FC236}">
+                <a16:creationId xmlns:a16="http://schemas.microsoft.com/office/drawing/2014/main" id="{A89C44C6-11EC-A343-61D4-4E957A9CC44D}"/>
+              </a:ext>
+            </a:extLst>
+          </p:cNvPr>
+          <p:cNvSpPr>
+            <a:spLocks noGrp="1"/>
+          </p:cNvSpPr>
+          <p:nvPr>
+            <p:ph type="body" idx="1"/>
+          </p:nvPr>
+        </p:nvSpPr>
+        <p:spPr/>
+        <p:txBody>
+          <a:bodyPr/>
+          <a:lstStyle/>
+          <a:p>
+            <a:endParaRPr lang="it-IT" dirty="0"/>
+          </a:p>
+        </p:txBody>
+      </p:sp>
+      <p:sp>
+        <p:nvSpPr>
+          <p:cNvPr id="4" name="Segnaposto numero diapositiva 3">
+            <a:extLst>
+              <a:ext uri="{FF2B5EF4-FFF2-40B4-BE49-F238E27FC236}">
+                <a16:creationId xmlns:a16="http://schemas.microsoft.com/office/drawing/2014/main" id="{795FF34B-7EF6-70C5-575C-FD01CD9AAB7E}"/>
+              </a:ext>
+            </a:extLst>
+          </p:cNvPr>
+          <p:cNvSpPr>
+            <a:spLocks noGrp="1"/>
+          </p:cNvSpPr>
+          <p:nvPr>
+            <p:ph type="sldNum" sz="quarter" idx="5"/>
+          </p:nvPr>
+        </p:nvSpPr>
+        <p:spPr/>
+        <p:txBody>
+          <a:bodyPr/>
+          <a:lstStyle/>
+          <a:p>
+            <a:fld id="{C205392F-55BF-4B8E-AF01-45F81C88C286}" type="slidenum">
+              <a:rPr lang="it-IT" smtClean="0"/>
+              <a:t>15</a:t>
+            </a:fld>
+            <a:endParaRPr lang="it-IT"/>
+          </a:p>
+        </p:txBody>
+      </p:sp>
+    </p:spTree>
+    <p:extLst>
+      <p:ext uri="{BB962C8B-B14F-4D97-AF65-F5344CB8AC3E}">
+        <p14:creationId xmlns:p14="http://schemas.microsoft.com/office/powerpoint/2010/main" val="4169571428"/>
+      </p:ext>
+    </p:extLst>
+  </p:cSld>
+  <p:clrMapOvr>
+    <a:masterClrMapping/>
+  </p:clrMapOvr>
+</p:notes>
+</file>
+
+<file path=ppt/notesSlides/notesSlide14.xml><?xml version="1.0" encoding="utf-8"?>
+<p:notes xmlns:a="http://schemas.openxmlformats.org/drawingml/2006/main" xmlns:r="http://schemas.openxmlformats.org/officeDocument/2006/relationships" xmlns:p="http://schemas.openxmlformats.org/presentationml/2006/main">
+  <p:cSld>
+    <p:spTree>
+      <p:nvGrpSpPr>
+        <p:cNvPr id="1" name="">
+          <a:extLst>
+            <a:ext uri="{FF2B5EF4-FFF2-40B4-BE49-F238E27FC236}">
               <a16:creationId xmlns:a16="http://schemas.microsoft.com/office/drawing/2014/main" id="{BB7F0520-249D-8DDB-E8C0-D326B992021B}"/>
             </a:ext>
           </a:extLst>
@@ -1882,7 +1991,7 @@
           <a:p>
             <a:fld id="{C205392F-55BF-4B8E-AF01-45F81C88C286}" type="slidenum">
               <a:rPr lang="it-IT" smtClean="0"/>
-              <a:t>15</a:t>
+              <a:t>16</a:t>
             </a:fld>
             <a:endParaRPr lang="it-IT"/>
           </a:p>
@@ -1901,7 +2010,7 @@
 </p:notes>
 </file>
 
-<file path=ppt/notesSlides/notesSlide14.xml><?xml version="1.0" encoding="utf-8"?>
+<file path=ppt/notesSlides/notesSlide15.xml><?xml version="1.0" encoding="utf-8"?>
 <p:notes xmlns:a="http://schemas.openxmlformats.org/drawingml/2006/main" xmlns:r="http://schemas.openxmlformats.org/officeDocument/2006/relationships" xmlns:p="http://schemas.openxmlformats.org/presentationml/2006/main">
   <p:cSld>
     <p:spTree>
@@ -1990,7 +2099,7 @@
           <a:p>
             <a:fld id="{C205392F-55BF-4B8E-AF01-45F81C88C286}" type="slidenum">
               <a:rPr lang="it-IT" smtClean="0"/>
-              <a:t>16</a:t>
+              <a:t>17</a:t>
             </a:fld>
             <a:endParaRPr lang="it-IT"/>
           </a:p>
@@ -3344,7 +3453,7 @@
           <a:p>
             <a:fld id="{4B734174-4AE7-4BE8-A29D-97641C0FB41A}" type="datetimeFigureOut">
               <a:rPr lang="it-IT" smtClean="0"/>
-              <a:t>11/07/2026</a:t>
+              <a:t>13/07/2026</a:t>
             </a:fld>
             <a:endParaRPr lang="it-IT"/>
           </a:p>
@@ -3542,7 +3651,7 @@
           <a:p>
             <a:fld id="{4B734174-4AE7-4BE8-A29D-97641C0FB41A}" type="datetimeFigureOut">
               <a:rPr lang="it-IT" smtClean="0"/>
-              <a:t>11/07/2026</a:t>
+              <a:t>13/07/2026</a:t>
             </a:fld>
             <a:endParaRPr lang="it-IT"/>
           </a:p>
@@ -3750,7 +3859,7 @@
           <a:p>
             <a:fld id="{4B734174-4AE7-4BE8-A29D-97641C0FB41A}" type="datetimeFigureOut">
               <a:rPr lang="it-IT" smtClean="0"/>
-              <a:t>11/07/2026</a:t>
+              <a:t>13/07/2026</a:t>
             </a:fld>
             <a:endParaRPr lang="it-IT"/>
           </a:p>
@@ -3948,7 +4057,7 @@
           <a:p>
             <a:fld id="{4B734174-4AE7-4BE8-A29D-97641C0FB41A}" type="datetimeFigureOut">
               <a:rPr lang="it-IT" smtClean="0"/>
-              <a:t>11/07/2026</a:t>
+              <a:t>13/07/2026</a:t>
             </a:fld>
             <a:endParaRPr lang="it-IT"/>
           </a:p>
@@ -4223,7 +4332,7 @@
           <a:p>
             <a:fld id="{4B734174-4AE7-4BE8-A29D-97641C0FB41A}" type="datetimeFigureOut">
               <a:rPr lang="it-IT" smtClean="0"/>
-              <a:t>11/07/2026</a:t>
+              <a:t>13/07/2026</a:t>
             </a:fld>
             <a:endParaRPr lang="it-IT"/>
           </a:p>
@@ -4488,7 +4597,7 @@
           <a:p>
             <a:fld id="{4B734174-4AE7-4BE8-A29D-97641C0FB41A}" type="datetimeFigureOut">
               <a:rPr lang="it-IT" smtClean="0"/>
-              <a:t>11/07/2026</a:t>
+              <a:t>13/07/2026</a:t>
             </a:fld>
             <a:endParaRPr lang="it-IT"/>
           </a:p>
@@ -4900,7 +5009,7 @@
           <a:p>
             <a:fld id="{4B734174-4AE7-4BE8-A29D-97641C0FB41A}" type="datetimeFigureOut">
               <a:rPr lang="it-IT" smtClean="0"/>
-              <a:t>11/07/2026</a:t>
+              <a:t>13/07/2026</a:t>
             </a:fld>
             <a:endParaRPr lang="it-IT"/>
           </a:p>
@@ -5041,7 +5150,7 @@
           <a:p>
             <a:fld id="{4B734174-4AE7-4BE8-A29D-97641C0FB41A}" type="datetimeFigureOut">
               <a:rPr lang="it-IT" smtClean="0"/>
-              <a:t>11/07/2026</a:t>
+              <a:t>13/07/2026</a:t>
             </a:fld>
             <a:endParaRPr lang="it-IT"/>
           </a:p>
@@ -5154,7 +5263,7 @@
           <a:p>
             <a:fld id="{4B734174-4AE7-4BE8-A29D-97641C0FB41A}" type="datetimeFigureOut">
               <a:rPr lang="it-IT" smtClean="0"/>
-              <a:t>11/07/2026</a:t>
+              <a:t>13/07/2026</a:t>
             </a:fld>
             <a:endParaRPr lang="it-IT"/>
           </a:p>
@@ -5465,7 +5574,7 @@
           <a:p>
             <a:fld id="{4B734174-4AE7-4BE8-A29D-97641C0FB41A}" type="datetimeFigureOut">
               <a:rPr lang="it-IT" smtClean="0"/>
-              <a:t>11/07/2026</a:t>
+              <a:t>13/07/2026</a:t>
             </a:fld>
             <a:endParaRPr lang="it-IT"/>
           </a:p>
@@ -5753,7 +5862,7 @@
           <a:p>
             <a:fld id="{4B734174-4AE7-4BE8-A29D-97641C0FB41A}" type="datetimeFigureOut">
               <a:rPr lang="it-IT" smtClean="0"/>
-              <a:t>11/07/2026</a:t>
+              <a:t>13/07/2026</a:t>
             </a:fld>
             <a:endParaRPr lang="it-IT"/>
           </a:p>
@@ -5994,7 +6103,7 @@
           <a:p>
             <a:fld id="{4B734174-4AE7-4BE8-A29D-97641C0FB41A}" type="datetimeFigureOut">
               <a:rPr lang="it-IT" smtClean="0"/>
-              <a:t>11/07/2026</a:t>
+              <a:t>13/07/2026</a:t>
             </a:fld>
             <a:endParaRPr lang="it-IT"/>
           </a:p>
@@ -6636,8 +6745,8 @@
           </a:p>
         </p:txBody>
       </p:sp>
-      <mc:AlternateContent xmlns:mc="http://schemas.openxmlformats.org/markup-compatibility/2006">
-        <mc:Choice xmlns:a14="http://schemas.microsoft.com/office/drawing/2010/main" Requires="a14">
+      <mc:AlternateContent xmlns:mc="http://schemas.openxmlformats.org/markup-compatibility/2006" xmlns:a14="http://schemas.microsoft.com/office/drawing/2010/main">
+        <mc:Choice Requires="a14">
           <p:sp>
             <p:nvSpPr>
               <p:cNvPr id="3" name="Segnaposto contenuto 2">
@@ -6904,7 +7013,7 @@
             </p:txBody>
           </p:sp>
         </mc:Choice>
-        <mc:Fallback>
+        <mc:Fallback xmlns="">
           <p:sp>
             <p:nvSpPr>
               <p:cNvPr id="3" name="Segnaposto contenuto 2">
@@ -7615,8 +7724,8 @@
           </a:p>
         </p:txBody>
       </p:sp>
-      <mc:AlternateContent xmlns:mc="http://schemas.openxmlformats.org/markup-compatibility/2006">
-        <mc:Choice xmlns:a14="http://schemas.microsoft.com/office/drawing/2010/main" Requires="a14">
+      <mc:AlternateContent xmlns:mc="http://schemas.openxmlformats.org/markup-compatibility/2006" xmlns:a14="http://schemas.microsoft.com/office/drawing/2010/main">
+        <mc:Choice Requires="a14">
           <p:sp>
             <p:nvSpPr>
               <p:cNvPr id="3" name="Segnaposto contenuto 2">
@@ -7991,7 +8100,7 @@
                         <m:begChr m:val="|"/>
                         <m:endChr m:val="|"/>
                         <m:ctrlPr>
-                          <a:rPr lang="it-IT" b="0" i="0" smtClean="0">
+                          <a:rPr lang="it-IT" b="0" i="1" smtClean="0">
                             <a:latin typeface="Cambria Math" panose="02040503050406030204" pitchFamily="18" charset="0"/>
                           </a:rPr>
                         </m:ctrlPr>
@@ -8317,7 +8426,7 @@
             </p:txBody>
           </p:sp>
         </mc:Choice>
-        <mc:Fallback>
+        <mc:Fallback xmlns="">
           <p:sp>
             <p:nvSpPr>
               <p:cNvPr id="3" name="Segnaposto contenuto 2">
@@ -8597,8 +8706,8 @@
           </a:p>
         </p:txBody>
       </p:sp>
-      <mc:AlternateContent xmlns:mc="http://schemas.openxmlformats.org/markup-compatibility/2006">
-        <mc:Choice xmlns:a14="http://schemas.microsoft.com/office/drawing/2010/main" Requires="a14">
+      <mc:AlternateContent xmlns:mc="http://schemas.openxmlformats.org/markup-compatibility/2006" xmlns:a14="http://schemas.microsoft.com/office/drawing/2010/main">
+        <mc:Choice Requires="a14">
           <p:sp>
             <p:nvSpPr>
               <p:cNvPr id="3" name="Segnaposto contenuto 2">
@@ -8751,7 +8860,7 @@
             </p:txBody>
           </p:sp>
         </mc:Choice>
-        <mc:Fallback>
+        <mc:Fallback xmlns="">
           <p:sp>
             <p:nvSpPr>
               <p:cNvPr id="3" name="Segnaposto contenuto 2">
@@ -9224,8 +9333,8 @@
           </a:fontRef>
         </p:style>
       </p:cxnSp>
-      <mc:AlternateContent xmlns:mc="http://schemas.openxmlformats.org/markup-compatibility/2006">
-        <mc:Choice xmlns:a14="http://schemas.microsoft.com/office/drawing/2010/main" Requires="a14">
+      <mc:AlternateContent xmlns:mc="http://schemas.openxmlformats.org/markup-compatibility/2006" xmlns:a14="http://schemas.microsoft.com/office/drawing/2010/main">
+        <mc:Choice Requires="a14">
           <p:sp>
             <p:nvSpPr>
               <p:cNvPr id="10" name="Rettangolo con angoli arrotondati 9">
@@ -9369,7 +9478,7 @@
             </p:txBody>
           </p:sp>
         </mc:Choice>
-        <mc:Fallback>
+        <mc:Fallback xmlns="">
           <p:sp>
             <p:nvSpPr>
               <p:cNvPr id="10" name="Rettangolo con angoli arrotondati 9">
@@ -9440,6 +9549,974 @@
         <p:cNvPr id="1" name="">
           <a:extLst>
             <a:ext uri="{FF2B5EF4-FFF2-40B4-BE49-F238E27FC236}">
+              <a16:creationId xmlns:a16="http://schemas.microsoft.com/office/drawing/2014/main" id="{5A12E42B-4D17-29F1-0492-833D4D13250C}"/>
+            </a:ext>
+          </a:extLst>
+        </p:cNvPr>
+        <p:cNvGrpSpPr/>
+        <p:nvPr/>
+      </p:nvGrpSpPr>
+      <p:grpSpPr>
+        <a:xfrm>
+          <a:off x="0" y="0"/>
+          <a:ext cx="0" cy="0"/>
+          <a:chOff x="0" y="0"/>
+          <a:chExt cx="0" cy="0"/>
+        </a:xfrm>
+      </p:grpSpPr>
+      <p:sp>
+        <p:nvSpPr>
+          <p:cNvPr id="2" name="Titolo 1">
+            <a:extLst>
+              <a:ext uri="{FF2B5EF4-FFF2-40B4-BE49-F238E27FC236}">
+                <a16:creationId xmlns:a16="http://schemas.microsoft.com/office/drawing/2014/main" id="{F74C0463-F978-9C3E-6B5F-97FDCA56D0B7}"/>
+              </a:ext>
+            </a:extLst>
+          </p:cNvPr>
+          <p:cNvSpPr>
+            <a:spLocks noGrp="1"/>
+          </p:cNvSpPr>
+          <p:nvPr>
+            <p:ph type="title"/>
+          </p:nvPr>
+        </p:nvSpPr>
+        <p:spPr>
+          <a:xfrm>
+            <a:off x="38100" y="69651"/>
+            <a:ext cx="12114000" cy="1153094"/>
+          </a:xfrm>
+          <a:prstGeom prst="roundRect">
+            <a:avLst>
+              <a:gd name="adj" fmla="val 36459"/>
+            </a:avLst>
+          </a:prstGeom>
+          <a:solidFill>
+            <a:srgbClr val="002060"/>
+          </a:solidFill>
+        </p:spPr>
+        <p:txBody>
+          <a:bodyPr>
+            <a:normAutofit/>
+          </a:bodyPr>
+          <a:lstStyle/>
+          <a:p>
+            <a:pPr algn="ctr"/>
+            <a:r>
+              <a:rPr lang="it-IT" b="1" dirty="0">
+                <a:solidFill>
+                  <a:schemeClr val="bg1"/>
+                </a:solidFill>
+              </a:rPr>
+              <a:t>FILTER 3: ANGULAR SELECTION</a:t>
+            </a:r>
+          </a:p>
+        </p:txBody>
+      </p:sp>
+      <p:sp>
+        <p:nvSpPr>
+          <p:cNvPr id="3" name="Segnaposto contenuto 2">
+            <a:extLst>
+              <a:ext uri="{FF2B5EF4-FFF2-40B4-BE49-F238E27FC236}">
+                <a16:creationId xmlns:a16="http://schemas.microsoft.com/office/drawing/2014/main" id="{FE767C3C-41AE-C823-40BF-F48CEACF7894}"/>
+              </a:ext>
+            </a:extLst>
+          </p:cNvPr>
+          <p:cNvSpPr>
+            <a:spLocks noGrp="1"/>
+          </p:cNvSpPr>
+          <p:nvPr>
+            <p:ph idx="1"/>
+          </p:nvPr>
+        </p:nvSpPr>
+        <p:spPr>
+          <a:xfrm>
+            <a:off x="838200" y="1401288"/>
+            <a:ext cx="10756900" cy="4955061"/>
+          </a:xfrm>
+        </p:spPr>
+        <p:txBody>
+          <a:bodyPr>
+            <a:normAutofit/>
+          </a:bodyPr>
+          <a:lstStyle/>
+          <a:p>
+            <a:pPr marL="0" indent="0" algn="ctr">
+              <a:buNone/>
+            </a:pPr>
+            <a:endParaRPr lang="it-IT" dirty="0"/>
+          </a:p>
+        </p:txBody>
+      </p:sp>
+      <p:sp>
+        <p:nvSpPr>
+          <p:cNvPr id="4" name="Segnaposto data 3">
+            <a:extLst>
+              <a:ext uri="{FF2B5EF4-FFF2-40B4-BE49-F238E27FC236}">
+                <a16:creationId xmlns:a16="http://schemas.microsoft.com/office/drawing/2014/main" id="{A3890638-8AE9-0D8A-1B1B-EDEFFD819E20}"/>
+              </a:ext>
+            </a:extLst>
+          </p:cNvPr>
+          <p:cNvSpPr>
+            <a:spLocks noGrp="1"/>
+          </p:cNvSpPr>
+          <p:nvPr>
+            <p:ph type="dt" sz="half" idx="10"/>
+          </p:nvPr>
+        </p:nvSpPr>
+        <p:spPr>
+          <a:xfrm>
+            <a:off x="838200" y="6356349"/>
+            <a:ext cx="2743200" cy="432000"/>
+          </a:xfrm>
+        </p:spPr>
+        <p:txBody>
+          <a:bodyPr/>
+          <a:lstStyle/>
+          <a:p>
+            <a:r>
+              <a:rPr lang="it-IT" sz="1500" b="1" dirty="0">
+                <a:solidFill>
+                  <a:srgbClr val="002060"/>
+                </a:solidFill>
+              </a:rPr>
+              <a:t>July 2026</a:t>
+            </a:r>
+          </a:p>
+        </p:txBody>
+      </p:sp>
+      <p:sp>
+        <p:nvSpPr>
+          <p:cNvPr id="5" name="Segnaposto piè di pagina 4">
+            <a:extLst>
+              <a:ext uri="{FF2B5EF4-FFF2-40B4-BE49-F238E27FC236}">
+                <a16:creationId xmlns:a16="http://schemas.microsoft.com/office/drawing/2014/main" id="{148DCFCE-6738-8F5E-949B-A7D3E0F9ABE7}"/>
+              </a:ext>
+            </a:extLst>
+          </p:cNvPr>
+          <p:cNvSpPr>
+            <a:spLocks noGrp="1"/>
+          </p:cNvSpPr>
+          <p:nvPr>
+            <p:ph type="ftr" sz="quarter" idx="11"/>
+          </p:nvPr>
+        </p:nvSpPr>
+        <p:spPr>
+          <a:xfrm>
+            <a:off x="0" y="6356349"/>
+            <a:ext cx="12192000" cy="432000"/>
+          </a:xfrm>
+        </p:spPr>
+        <p:txBody>
+          <a:bodyPr/>
+          <a:lstStyle/>
+          <a:p>
+            <a:r>
+              <a:rPr lang="it-IT" sz="1500" b="1" dirty="0">
+                <a:solidFill>
+                  <a:srgbClr val="002060"/>
+                </a:solidFill>
+              </a:rPr>
+              <a:t>Anna Sofia Moro</a:t>
+            </a:r>
+          </a:p>
+        </p:txBody>
+      </p:sp>
+      <p:sp>
+        <p:nvSpPr>
+          <p:cNvPr id="6" name="Segnaposto numero diapositiva 5">
+            <a:extLst>
+              <a:ext uri="{FF2B5EF4-FFF2-40B4-BE49-F238E27FC236}">
+                <a16:creationId xmlns:a16="http://schemas.microsoft.com/office/drawing/2014/main" id="{1BE116E6-A16F-D0F6-246D-521630EA5271}"/>
+              </a:ext>
+            </a:extLst>
+          </p:cNvPr>
+          <p:cNvSpPr>
+            <a:spLocks noGrp="1"/>
+          </p:cNvSpPr>
+          <p:nvPr>
+            <p:ph type="sldNum" sz="quarter" idx="12"/>
+          </p:nvPr>
+        </p:nvSpPr>
+        <p:spPr>
+          <a:xfrm>
+            <a:off x="8610600" y="6356349"/>
+            <a:ext cx="2743200" cy="432000"/>
+          </a:xfrm>
+        </p:spPr>
+        <p:txBody>
+          <a:bodyPr/>
+          <a:lstStyle/>
+          <a:p>
+            <a:fld id="{0A318BD9-CA14-4A83-ACF0-03D5918EB402}" type="slidenum">
+              <a:rPr lang="it-IT" sz="1500" b="1" smtClean="0">
+                <a:solidFill>
+                  <a:srgbClr val="002060"/>
+                </a:solidFill>
+              </a:rPr>
+              <a:t>15</a:t>
+            </a:fld>
+            <a:endParaRPr lang="it-IT" sz="1500" b="1" dirty="0">
+              <a:solidFill>
+                <a:srgbClr val="002060"/>
+              </a:solidFill>
+            </a:endParaRPr>
+          </a:p>
+        </p:txBody>
+      </p:sp>
+      <p:pic>
+        <p:nvPicPr>
+          <p:cNvPr id="9" name="Immagine 8">
+            <a:extLst>
+              <a:ext uri="{FF2B5EF4-FFF2-40B4-BE49-F238E27FC236}">
+                <a16:creationId xmlns:a16="http://schemas.microsoft.com/office/drawing/2014/main" id="{BE0777E0-C005-D9B9-AC61-B5240A93FA87}"/>
+              </a:ext>
+            </a:extLst>
+          </p:cNvPr>
+          <p:cNvPicPr>
+            <a:picLocks noChangeAspect="1"/>
+          </p:cNvPicPr>
+          <p:nvPr/>
+        </p:nvPicPr>
+        <p:blipFill>
+          <a:blip r:embed="rId3">
+            <a:extLst>
+              <a:ext uri="{28A0092B-C50C-407E-A947-70E740481C1C}">
+                <a14:useLocalDpi xmlns:a14="http://schemas.microsoft.com/office/drawing/2010/main" val="0"/>
+              </a:ext>
+            </a:extLst>
+          </a:blip>
+          <a:stretch>
+            <a:fillRect/>
+          </a:stretch>
+        </p:blipFill>
+        <p:spPr>
+          <a:xfrm>
+            <a:off x="1879714" y="1241995"/>
+            <a:ext cx="8432572" cy="5253769"/>
+          </a:xfrm>
+          <a:prstGeom prst="rect">
+            <a:avLst/>
+          </a:prstGeom>
+        </p:spPr>
+      </p:pic>
+      <p:cxnSp>
+        <p:nvCxnSpPr>
+          <p:cNvPr id="8" name="Connettore 2 7">
+            <a:extLst>
+              <a:ext uri="{FF2B5EF4-FFF2-40B4-BE49-F238E27FC236}">
+                <a16:creationId xmlns:a16="http://schemas.microsoft.com/office/drawing/2014/main" id="{90ED31A2-2750-6DBE-A550-5FFADC87C0BF}"/>
+              </a:ext>
+            </a:extLst>
+          </p:cNvPr>
+          <p:cNvCxnSpPr/>
+          <p:nvPr/>
+        </p:nvCxnSpPr>
+        <p:spPr>
+          <a:xfrm flipH="1">
+            <a:off x="4340994" y="1876926"/>
+            <a:ext cx="625642" cy="192506"/>
+          </a:xfrm>
+          <a:prstGeom prst="straightConnector1">
+            <a:avLst/>
+          </a:prstGeom>
+          <a:ln w="38100">
+            <a:solidFill>
+              <a:srgbClr val="FF0000"/>
+            </a:solidFill>
+            <a:tailEnd type="triangle"/>
+          </a:ln>
+        </p:spPr>
+        <p:style>
+          <a:lnRef idx="2">
+            <a:schemeClr val="accent1"/>
+          </a:lnRef>
+          <a:fillRef idx="0">
+            <a:schemeClr val="accent1"/>
+          </a:fillRef>
+          <a:effectRef idx="1">
+            <a:schemeClr val="accent1"/>
+          </a:effectRef>
+          <a:fontRef idx="minor">
+            <a:schemeClr val="tx1"/>
+          </a:fontRef>
+        </p:style>
+      </p:cxnSp>
+      <mc:AlternateContent xmlns:mc="http://schemas.openxmlformats.org/markup-compatibility/2006">
+        <mc:Choice xmlns:a14="http://schemas.microsoft.com/office/drawing/2010/main" Requires="a14">
+          <p:sp>
+            <p:nvSpPr>
+              <p:cNvPr id="10" name="Rettangolo con angoli arrotondati 9">
+                <a:extLst>
+                  <a:ext uri="{FF2B5EF4-FFF2-40B4-BE49-F238E27FC236}">
+                    <a16:creationId xmlns:a16="http://schemas.microsoft.com/office/drawing/2014/main" id="{CC9112EC-AE86-AFD9-0174-3481E39BB98E}"/>
+                  </a:ext>
+                </a:extLst>
+              </p:cNvPr>
+              <p:cNvSpPr/>
+              <p:nvPr/>
+            </p:nvSpPr>
+            <p:spPr>
+              <a:xfrm>
+                <a:off x="4966636" y="1588168"/>
+                <a:ext cx="1197097" cy="567891"/>
+              </a:xfrm>
+              <a:prstGeom prst="roundRect">
+                <a:avLst/>
+              </a:prstGeom>
+              <a:solidFill>
+                <a:schemeClr val="bg1"/>
+              </a:solidFill>
+              <a:ln w="38100">
+                <a:solidFill>
+                  <a:srgbClr val="FF0000"/>
+                </a:solidFill>
+              </a:ln>
+            </p:spPr>
+            <p:style>
+              <a:lnRef idx="2">
+                <a:schemeClr val="accent1">
+                  <a:shade val="15000"/>
+                </a:schemeClr>
+              </a:lnRef>
+              <a:fillRef idx="1">
+                <a:schemeClr val="accent1"/>
+              </a:fillRef>
+              <a:effectRef idx="0">
+                <a:schemeClr val="accent1"/>
+              </a:effectRef>
+              <a:fontRef idx="minor">
+                <a:schemeClr val="lt1"/>
+              </a:fontRef>
+            </p:style>
+            <p:txBody>
+              <a:bodyPr rtlCol="0" anchor="ctr"/>
+              <a:lstStyle/>
+              <a:p>
+                <a:pPr algn="ctr"/>
+                <a14:m>
+                  <m:oMath xmlns:m="http://schemas.openxmlformats.org/officeDocument/2006/math">
+                    <m:r>
+                      <a:rPr lang="it-IT" b="0" i="1" smtClean="0">
+                        <a:solidFill>
+                          <a:schemeClr val="tx1"/>
+                        </a:solidFill>
+                        <a:latin typeface="Cambria Math" panose="02040503050406030204" pitchFamily="18" charset="0"/>
+                      </a:rPr>
+                      <m:t>±</m:t>
+                    </m:r>
+                    <m:f>
+                      <m:fPr>
+                        <m:ctrlPr>
+                          <a:rPr lang="it-IT" b="0" i="1" smtClean="0">
+                            <a:solidFill>
+                              <a:schemeClr val="tx1"/>
+                            </a:solidFill>
+                            <a:latin typeface="Cambria Math" panose="02040503050406030204" pitchFamily="18" charset="0"/>
+                          </a:rPr>
+                        </m:ctrlPr>
+                      </m:fPr>
+                      <m:num>
+                        <m:r>
+                          <a:rPr lang="it-IT" b="0" i="1" smtClean="0">
+                            <a:solidFill>
+                              <a:schemeClr val="tx1"/>
+                            </a:solidFill>
+                            <a:latin typeface="Cambria Math" panose="02040503050406030204" pitchFamily="18" charset="0"/>
+                          </a:rPr>
+                          <m:t>1</m:t>
+                        </m:r>
+                      </m:num>
+                      <m:den>
+                        <m:r>
+                          <a:rPr lang="it-IT" b="0" i="1" smtClean="0">
+                            <a:solidFill>
+                              <a:schemeClr val="tx1"/>
+                            </a:solidFill>
+                            <a:latin typeface="Cambria Math" panose="02040503050406030204" pitchFamily="18" charset="0"/>
+                          </a:rPr>
+                          <m:t>2</m:t>
+                        </m:r>
+                      </m:den>
+                    </m:f>
+                    <m:sSub>
+                      <m:sSubPr>
+                        <m:ctrlPr>
+                          <a:rPr lang="it-IT" b="0" i="1" smtClean="0">
+                            <a:solidFill>
+                              <a:schemeClr val="tx1"/>
+                            </a:solidFill>
+                            <a:latin typeface="Cambria Math" panose="02040503050406030204" pitchFamily="18" charset="0"/>
+                          </a:rPr>
+                        </m:ctrlPr>
+                      </m:sSubPr>
+                      <m:e>
+                        <m:r>
+                          <a:rPr lang="it-IT" b="0" i="1" smtClean="0">
+                            <a:solidFill>
+                              <a:schemeClr val="tx1"/>
+                            </a:solidFill>
+                            <a:latin typeface="Cambria Math" panose="02040503050406030204" pitchFamily="18" charset="0"/>
+                          </a:rPr>
+                          <m:t>𝜃</m:t>
+                        </m:r>
+                      </m:e>
+                      <m:sub>
+                        <m:r>
+                          <a:rPr lang="it-IT" b="0" i="1" smtClean="0">
+                            <a:solidFill>
+                              <a:schemeClr val="tx1"/>
+                            </a:solidFill>
+                            <a:latin typeface="Cambria Math" panose="02040503050406030204" pitchFamily="18" charset="0"/>
+                          </a:rPr>
+                          <m:t>𝐿</m:t>
+                        </m:r>
+                      </m:sub>
+                    </m:sSub>
+                  </m:oMath>
+                </a14:m>
+                <a:r>
+                  <a:rPr lang="it-IT" dirty="0">
+                    <a:solidFill>
+                      <a:schemeClr val="tx1"/>
+                    </a:solidFill>
+                  </a:rPr>
+                  <a:t> cut</a:t>
+                </a:r>
+              </a:p>
+            </p:txBody>
+          </p:sp>
+        </mc:Choice>
+        <mc:Fallback>
+          <p:sp>
+            <p:nvSpPr>
+              <p:cNvPr id="10" name="Rettangolo con angoli arrotondati 9">
+                <a:extLst>
+                  <a:ext uri="{FF2B5EF4-FFF2-40B4-BE49-F238E27FC236}">
+                    <a16:creationId xmlns:a16="http://schemas.microsoft.com/office/drawing/2014/main" id="{CC9112EC-AE86-AFD9-0174-3481E39BB98E}"/>
+                  </a:ext>
+                </a:extLst>
+              </p:cNvPr>
+              <p:cNvSpPr>
+                <a:spLocks noRot="1" noChangeAspect="1" noMove="1" noResize="1" noEditPoints="1" noAdjustHandles="1" noChangeArrowheads="1" noChangeShapeType="1" noTextEdit="1"/>
+              </p:cNvSpPr>
+              <p:nvPr/>
+            </p:nvSpPr>
+            <p:spPr>
+              <a:xfrm>
+                <a:off x="4966636" y="1588168"/>
+                <a:ext cx="1197097" cy="567891"/>
+              </a:xfrm>
+              <a:prstGeom prst="roundRect">
+                <a:avLst/>
+              </a:prstGeom>
+              <a:blipFill>
+                <a:blip r:embed="rId4"/>
+                <a:stretch>
+                  <a:fillRect/>
+                </a:stretch>
+              </a:blipFill>
+              <a:ln w="38100">
+                <a:solidFill>
+                  <a:srgbClr val="FF0000"/>
+                </a:solidFill>
+              </a:ln>
+            </p:spPr>
+            <p:txBody>
+              <a:bodyPr/>
+              <a:lstStyle/>
+              <a:p>
+                <a:r>
+                  <a:rPr lang="it-IT">
+                    <a:noFill/>
+                  </a:rPr>
+                  <a:t> </a:t>
+                </a:r>
+              </a:p>
+            </p:txBody>
+          </p:sp>
+        </mc:Fallback>
+      </mc:AlternateContent>
+      <mc:AlternateContent xmlns:mc="http://schemas.openxmlformats.org/markup-compatibility/2006">
+        <mc:Choice xmlns:a14="http://schemas.microsoft.com/office/drawing/2010/main" Requires="a14">
+          <p:sp>
+            <p:nvSpPr>
+              <p:cNvPr id="11" name="Rettangolo con angoli arrotondati 10">
+                <a:extLst>
+                  <a:ext uri="{FF2B5EF4-FFF2-40B4-BE49-F238E27FC236}">
+                    <a16:creationId xmlns:a16="http://schemas.microsoft.com/office/drawing/2014/main" id="{5E292DFE-89F8-ED17-3853-C163B1C769F0}"/>
+                  </a:ext>
+                </a:extLst>
+              </p:cNvPr>
+              <p:cNvSpPr/>
+              <p:nvPr/>
+            </p:nvSpPr>
+            <p:spPr>
+              <a:xfrm>
+                <a:off x="7768117" y="3165481"/>
+                <a:ext cx="4125433" cy="1406795"/>
+              </a:xfrm>
+              <a:prstGeom prst="roundRect">
+                <a:avLst/>
+              </a:prstGeom>
+              <a:solidFill>
+                <a:schemeClr val="bg1"/>
+              </a:solidFill>
+              <a:ln w="38100">
+                <a:solidFill>
+                  <a:srgbClr val="FFC000"/>
+                </a:solidFill>
+              </a:ln>
+            </p:spPr>
+            <p:style>
+              <a:lnRef idx="2">
+                <a:schemeClr val="accent1">
+                  <a:shade val="15000"/>
+                </a:schemeClr>
+              </a:lnRef>
+              <a:fillRef idx="1">
+                <a:schemeClr val="accent1"/>
+              </a:fillRef>
+              <a:effectRef idx="0">
+                <a:schemeClr val="accent1"/>
+              </a:effectRef>
+              <a:fontRef idx="minor">
+                <a:schemeClr val="lt1"/>
+              </a:fontRef>
+            </p:style>
+            <p:txBody>
+              <a:bodyPr rtlCol="0" anchor="ctr"/>
+              <a:lstStyle/>
+              <a:p>
+                <a:pPr algn="ctr"/>
+                <a:r>
+                  <a:rPr lang="it-IT" sz="2100" dirty="0">
+                    <a:solidFill>
+                      <a:srgbClr val="FFC000"/>
+                    </a:solidFill>
+                  </a:rPr>
+                  <a:t>next step:  </a:t>
+                </a:r>
+                <a:r>
+                  <a:rPr lang="it-IT" sz="2100" dirty="0" err="1">
+                    <a:solidFill>
+                      <a:srgbClr val="FFC000"/>
+                    </a:solidFill>
+                  </a:rPr>
+                  <a:t>instead</a:t>
+                </a:r>
+                <a:r>
+                  <a:rPr lang="it-IT" sz="2100" dirty="0">
+                    <a:solidFill>
+                      <a:srgbClr val="FFC000"/>
+                    </a:solidFill>
+                  </a:rPr>
+                  <a:t> of a </a:t>
+                </a:r>
+                <a:r>
+                  <a:rPr lang="it-IT" sz="2100" dirty="0" err="1">
+                    <a:solidFill>
+                      <a:srgbClr val="FFC000"/>
+                    </a:solidFill>
+                  </a:rPr>
+                  <a:t>flat</a:t>
+                </a:r>
+                <a:r>
+                  <a:rPr lang="it-IT" sz="2100" dirty="0">
+                    <a:solidFill>
+                      <a:srgbClr val="FFC000"/>
+                    </a:solidFill>
+                  </a:rPr>
+                  <a:t> cut, we upgrade to:</a:t>
+                </a:r>
+              </a:p>
+              <a:p>
+                <a:pPr algn="ctr"/>
+                <a14:m>
+                  <m:oMathPara xmlns:m="http://schemas.openxmlformats.org/officeDocument/2006/math">
+                    <m:oMathParaPr>
+                      <m:jc m:val="centerGroup"/>
+                    </m:oMathParaPr>
+                    <m:oMath xmlns:m="http://schemas.openxmlformats.org/officeDocument/2006/math">
+                      <m:d>
+                        <m:dPr>
+                          <m:begChr m:val="|"/>
+                          <m:endChr m:val="|"/>
+                          <m:ctrlPr>
+                            <a:rPr lang="it-IT" sz="2100" b="0" i="1" smtClean="0">
+                              <a:solidFill>
+                                <a:srgbClr val="FFC000"/>
+                              </a:solidFill>
+                              <a:latin typeface="Cambria Math" panose="02040503050406030204" pitchFamily="18" charset="0"/>
+                            </a:rPr>
+                          </m:ctrlPr>
+                        </m:dPr>
+                        <m:e>
+                          <m:sSub>
+                            <m:sSubPr>
+                              <m:ctrlPr>
+                                <a:rPr lang="it-IT" sz="2100" b="0" i="1" smtClean="0">
+                                  <a:solidFill>
+                                    <a:srgbClr val="FFC000"/>
+                                  </a:solidFill>
+                                  <a:latin typeface="Cambria Math" panose="02040503050406030204" pitchFamily="18" charset="0"/>
+                                </a:rPr>
+                              </m:ctrlPr>
+                            </m:sSubPr>
+                            <m:e>
+                              <m:r>
+                                <a:rPr lang="it-IT" sz="2100" b="0" i="1" smtClean="0">
+                                  <a:solidFill>
+                                    <a:srgbClr val="FFC000"/>
+                                  </a:solidFill>
+                                  <a:latin typeface="Cambria Math" panose="02040503050406030204" pitchFamily="18" charset="0"/>
+                                </a:rPr>
+                                <m:t>𝜃</m:t>
+                              </m:r>
+                            </m:e>
+                            <m:sub>
+                              <m:r>
+                                <a:rPr lang="it-IT" sz="2100" b="0" i="1" smtClean="0">
+                                  <a:solidFill>
+                                    <a:srgbClr val="FFC000"/>
+                                  </a:solidFill>
+                                  <a:latin typeface="Cambria Math" panose="02040503050406030204" pitchFamily="18" charset="0"/>
+                                </a:rPr>
+                                <m:t>𝑖𝑛</m:t>
+                              </m:r>
+                              <m:r>
+                                <a:rPr lang="it-IT" sz="2100" b="0" i="1" smtClean="0">
+                                  <a:solidFill>
+                                    <a:srgbClr val="FFC000"/>
+                                  </a:solidFill>
+                                  <a:latin typeface="Cambria Math" panose="02040503050406030204" pitchFamily="18" charset="0"/>
+                                </a:rPr>
+                                <m:t>,</m:t>
+                              </m:r>
+                              <m:r>
+                                <a:rPr lang="it-IT" sz="2100" b="0" i="1" smtClean="0">
+                                  <a:solidFill>
+                                    <a:srgbClr val="FFC000"/>
+                                  </a:solidFill>
+                                  <a:latin typeface="Cambria Math" panose="02040503050406030204" pitchFamily="18" charset="0"/>
+                                </a:rPr>
+                                <m:t>𝑥</m:t>
+                              </m:r>
+                            </m:sub>
+                          </m:sSub>
+                          <m:r>
+                            <a:rPr lang="it-IT" sz="2100" b="0" i="1" smtClean="0">
+                              <a:solidFill>
+                                <a:srgbClr val="FFC000"/>
+                              </a:solidFill>
+                              <a:latin typeface="Cambria Math" panose="02040503050406030204" pitchFamily="18" charset="0"/>
+                            </a:rPr>
+                            <m:t>−</m:t>
+                          </m:r>
+                          <m:d>
+                            <m:dPr>
+                              <m:ctrlPr>
+                                <a:rPr lang="it-IT" sz="2100" b="0" i="1" smtClean="0">
+                                  <a:solidFill>
+                                    <a:srgbClr val="FFC000"/>
+                                  </a:solidFill>
+                                  <a:latin typeface="Cambria Math" panose="02040503050406030204" pitchFamily="18" charset="0"/>
+                                </a:rPr>
+                              </m:ctrlPr>
+                            </m:dPr>
+                            <m:e>
+                              <m:sSub>
+                                <m:sSubPr>
+                                  <m:ctrlPr>
+                                    <a:rPr lang="it-IT" sz="2100" b="0" i="1" smtClean="0">
+                                      <a:solidFill>
+                                        <a:srgbClr val="FFC000"/>
+                                      </a:solidFill>
+                                      <a:latin typeface="Cambria Math" panose="02040503050406030204" pitchFamily="18" charset="0"/>
+                                    </a:rPr>
+                                  </m:ctrlPr>
+                                </m:sSubPr>
+                                <m:e>
+                                  <m:r>
+                                    <a:rPr lang="it-IT" sz="2100" b="0" i="1" smtClean="0">
+                                      <a:solidFill>
+                                        <a:srgbClr val="FFC000"/>
+                                      </a:solidFill>
+                                      <a:latin typeface="Cambria Math" panose="02040503050406030204" pitchFamily="18" charset="0"/>
+                                    </a:rPr>
+                                    <m:t>𝜃</m:t>
+                                  </m:r>
+                                </m:e>
+                                <m:sub>
+                                  <m:r>
+                                    <a:rPr lang="it-IT" sz="2100" b="0" i="1" smtClean="0">
+                                      <a:solidFill>
+                                        <a:srgbClr val="FFC000"/>
+                                      </a:solidFill>
+                                      <a:latin typeface="Cambria Math" panose="02040503050406030204" pitchFamily="18" charset="0"/>
+                                    </a:rPr>
+                                    <m:t>0</m:t>
+                                  </m:r>
+                                </m:sub>
+                              </m:sSub>
+                              <m:r>
+                                <a:rPr lang="it-IT" sz="2100" b="0" i="1" smtClean="0">
+                                  <a:solidFill>
+                                    <a:srgbClr val="FFC000"/>
+                                  </a:solidFill>
+                                  <a:latin typeface="Cambria Math" panose="02040503050406030204" pitchFamily="18" charset="0"/>
+                                </a:rPr>
+                                <m:t>+</m:t>
+                              </m:r>
+                              <m:sSub>
+                                <m:sSubPr>
+                                  <m:ctrlPr>
+                                    <a:rPr lang="it-IT" sz="2100" b="0" i="1" smtClean="0">
+                                      <a:solidFill>
+                                        <a:srgbClr val="FFC000"/>
+                                      </a:solidFill>
+                                      <a:latin typeface="Cambria Math" panose="02040503050406030204" pitchFamily="18" charset="0"/>
+                                    </a:rPr>
+                                  </m:ctrlPr>
+                                </m:sSubPr>
+                                <m:e>
+                                  <m:r>
+                                    <a:rPr lang="it-IT" sz="2100" b="0" i="1" smtClean="0">
+                                      <a:solidFill>
+                                        <a:srgbClr val="FFC000"/>
+                                      </a:solidFill>
+                                      <a:latin typeface="Cambria Math" panose="02040503050406030204" pitchFamily="18" charset="0"/>
+                                    </a:rPr>
+                                    <m:t>𝜏</m:t>
+                                  </m:r>
+                                </m:e>
+                                <m:sub>
+                                  <m:r>
+                                    <a:rPr lang="it-IT" sz="2100" b="0" i="1" smtClean="0">
+                                      <a:solidFill>
+                                        <a:srgbClr val="FFC000"/>
+                                      </a:solidFill>
+                                      <a:latin typeface="Cambria Math" panose="02040503050406030204" pitchFamily="18" charset="0"/>
+                                    </a:rPr>
+                                    <m:t>𝑦</m:t>
+                                  </m:r>
+                                </m:sub>
+                              </m:sSub>
+                              <m:r>
+                                <a:rPr lang="it-IT" sz="2100" b="0" i="1" smtClean="0">
+                                  <a:solidFill>
+                                    <a:srgbClr val="FFC000"/>
+                                  </a:solidFill>
+                                  <a:latin typeface="Cambria Math" panose="02040503050406030204" pitchFamily="18" charset="0"/>
+                                </a:rPr>
+                                <m:t>∗</m:t>
+                              </m:r>
+                              <m:r>
+                                <a:rPr lang="it-IT" sz="2100" b="0" i="1" smtClean="0">
+                                  <a:solidFill>
+                                    <a:srgbClr val="FFC000"/>
+                                  </a:solidFill>
+                                  <a:latin typeface="Cambria Math" panose="02040503050406030204" pitchFamily="18" charset="0"/>
+                                </a:rPr>
+                                <m:t>𝑑</m:t>
+                              </m:r>
+                              <m:sSub>
+                                <m:sSubPr>
+                                  <m:ctrlPr>
+                                    <a:rPr lang="it-IT" sz="2100" b="0" i="1" smtClean="0">
+                                      <a:solidFill>
+                                        <a:srgbClr val="FFC000"/>
+                                      </a:solidFill>
+                                      <a:latin typeface="Cambria Math" panose="02040503050406030204" pitchFamily="18" charset="0"/>
+                                    </a:rPr>
+                                  </m:ctrlPr>
+                                </m:sSubPr>
+                                <m:e>
+                                  <m:r>
+                                    <a:rPr lang="it-IT" sz="2100" b="0" i="1" smtClean="0">
+                                      <a:solidFill>
+                                        <a:srgbClr val="FFC000"/>
+                                      </a:solidFill>
+                                      <a:latin typeface="Cambria Math" panose="02040503050406030204" pitchFamily="18" charset="0"/>
+                                    </a:rPr>
+                                    <m:t>0</m:t>
+                                  </m:r>
+                                </m:e>
+                                <m:sub>
+                                  <m:r>
+                                    <a:rPr lang="it-IT" sz="2100" b="0" i="1" smtClean="0">
+                                      <a:solidFill>
+                                        <a:srgbClr val="FFC000"/>
+                                      </a:solidFill>
+                                      <a:latin typeface="Cambria Math" panose="02040503050406030204" pitchFamily="18" charset="0"/>
+                                    </a:rPr>
+                                    <m:t>𝑦</m:t>
+                                  </m:r>
+                                </m:sub>
+                              </m:sSub>
+                            </m:e>
+                          </m:d>
+                        </m:e>
+                      </m:d>
+                      <m:r>
+                        <a:rPr lang="it-IT" sz="2100" b="0" i="1" smtClean="0">
+                          <a:solidFill>
+                            <a:srgbClr val="FFC000"/>
+                          </a:solidFill>
+                          <a:latin typeface="Cambria Math" panose="02040503050406030204" pitchFamily="18" charset="0"/>
+                        </a:rPr>
+                        <m:t>&lt;</m:t>
+                      </m:r>
+                      <m:f>
+                        <m:fPr>
+                          <m:ctrlPr>
+                            <a:rPr lang="it-IT" sz="2100" b="0" i="1" smtClean="0">
+                              <a:solidFill>
+                                <a:srgbClr val="FFC000"/>
+                              </a:solidFill>
+                              <a:latin typeface="Cambria Math" panose="02040503050406030204" pitchFamily="18" charset="0"/>
+                            </a:rPr>
+                          </m:ctrlPr>
+                        </m:fPr>
+                        <m:num>
+                          <m:r>
+                            <a:rPr lang="it-IT" sz="2100" b="0" i="1" smtClean="0">
+                              <a:solidFill>
+                                <a:srgbClr val="FFC000"/>
+                              </a:solidFill>
+                              <a:latin typeface="Cambria Math" panose="02040503050406030204" pitchFamily="18" charset="0"/>
+                            </a:rPr>
+                            <m:t>1</m:t>
+                          </m:r>
+                        </m:num>
+                        <m:den>
+                          <m:r>
+                            <a:rPr lang="it-IT" sz="2100" b="0" i="1" smtClean="0">
+                              <a:solidFill>
+                                <a:srgbClr val="FFC000"/>
+                              </a:solidFill>
+                              <a:latin typeface="Cambria Math" panose="02040503050406030204" pitchFamily="18" charset="0"/>
+                            </a:rPr>
+                            <m:t>2</m:t>
+                          </m:r>
+                        </m:den>
+                      </m:f>
+                      <m:sSub>
+                        <m:sSubPr>
+                          <m:ctrlPr>
+                            <a:rPr lang="it-IT" sz="2100" b="0" i="1" smtClean="0">
+                              <a:solidFill>
+                                <a:srgbClr val="FFC000"/>
+                              </a:solidFill>
+                              <a:latin typeface="Cambria Math" panose="02040503050406030204" pitchFamily="18" charset="0"/>
+                            </a:rPr>
+                          </m:ctrlPr>
+                        </m:sSubPr>
+                        <m:e>
+                          <m:r>
+                            <a:rPr lang="it-IT" sz="2100" b="0" i="1" smtClean="0">
+                              <a:solidFill>
+                                <a:srgbClr val="FFC000"/>
+                              </a:solidFill>
+                              <a:latin typeface="Cambria Math" panose="02040503050406030204" pitchFamily="18" charset="0"/>
+                            </a:rPr>
+                            <m:t>𝜃</m:t>
+                          </m:r>
+                        </m:e>
+                        <m:sub>
+                          <m:r>
+                            <a:rPr lang="it-IT" sz="2100" b="0" i="1" smtClean="0">
+                              <a:solidFill>
+                                <a:srgbClr val="FFC000"/>
+                              </a:solidFill>
+                              <a:latin typeface="Cambria Math" panose="02040503050406030204" pitchFamily="18" charset="0"/>
+                            </a:rPr>
+                            <m:t>𝐿</m:t>
+                          </m:r>
+                        </m:sub>
+                      </m:sSub>
+                    </m:oMath>
+                  </m:oMathPara>
+                </a14:m>
+                <a:endParaRPr lang="it-IT" sz="2100" dirty="0">
+                  <a:solidFill>
+                    <a:srgbClr val="FFC000"/>
+                  </a:solidFill>
+                </a:endParaRPr>
+              </a:p>
+            </p:txBody>
+          </p:sp>
+        </mc:Choice>
+        <mc:Fallback>
+          <p:sp>
+            <p:nvSpPr>
+              <p:cNvPr id="11" name="Rettangolo con angoli arrotondati 10">
+                <a:extLst>
+                  <a:ext uri="{FF2B5EF4-FFF2-40B4-BE49-F238E27FC236}">
+                    <a16:creationId xmlns:a16="http://schemas.microsoft.com/office/drawing/2014/main" id="{5E292DFE-89F8-ED17-3853-C163B1C769F0}"/>
+                  </a:ext>
+                </a:extLst>
+              </p:cNvPr>
+              <p:cNvSpPr>
+                <a:spLocks noRot="1" noChangeAspect="1" noMove="1" noResize="1" noEditPoints="1" noAdjustHandles="1" noChangeArrowheads="1" noChangeShapeType="1" noTextEdit="1"/>
+              </p:cNvSpPr>
+              <p:nvPr/>
+            </p:nvSpPr>
+            <p:spPr>
+              <a:xfrm>
+                <a:off x="7768117" y="3165481"/>
+                <a:ext cx="4125433" cy="1406795"/>
+              </a:xfrm>
+              <a:prstGeom prst="roundRect">
+                <a:avLst/>
+              </a:prstGeom>
+              <a:blipFill>
+                <a:blip r:embed="rId5"/>
+                <a:stretch>
+                  <a:fillRect/>
+                </a:stretch>
+              </a:blipFill>
+              <a:ln w="38100">
+                <a:solidFill>
+                  <a:srgbClr val="FFC000"/>
+                </a:solidFill>
+              </a:ln>
+            </p:spPr>
+            <p:txBody>
+              <a:bodyPr/>
+              <a:lstStyle/>
+              <a:p>
+                <a:r>
+                  <a:rPr lang="it-IT">
+                    <a:noFill/>
+                  </a:rPr>
+                  <a:t> </a:t>
+                </a:r>
+              </a:p>
+            </p:txBody>
+          </p:sp>
+        </mc:Fallback>
+      </mc:AlternateContent>
+    </p:spTree>
+    <p:extLst>
+      <p:ext uri="{BB962C8B-B14F-4D97-AF65-F5344CB8AC3E}">
+        <p14:creationId xmlns:p14="http://schemas.microsoft.com/office/powerpoint/2010/main" val="3869003200"/>
+      </p:ext>
+    </p:extLst>
+  </p:cSld>
+  <p:clrMapOvr>
+    <a:masterClrMapping/>
+  </p:clrMapOvr>
+</p:sld>
+</file>
+
+<file path=ppt/slides/slide16.xml><?xml version="1.0" encoding="utf-8"?>
+<p:sld xmlns:a="http://schemas.openxmlformats.org/drawingml/2006/main" xmlns:r="http://schemas.openxmlformats.org/officeDocument/2006/relationships" xmlns:p="http://schemas.openxmlformats.org/presentationml/2006/main">
+  <p:cSld>
+    <p:spTree>
+      <p:nvGrpSpPr>
+        <p:cNvPr id="1" name="">
+          <a:extLst>
+            <a:ext uri="{FF2B5EF4-FFF2-40B4-BE49-F238E27FC236}">
               <a16:creationId xmlns:a16="http://schemas.microsoft.com/office/drawing/2014/main" id="{E8B5B9E4-761A-9415-9AC0-44BD4B4801F5}"/>
             </a:ext>
           </a:extLst>
@@ -9769,7 +10846,7 @@
                   <a:srgbClr val="002060"/>
                 </a:solidFill>
               </a:rPr>
-              <a:t>15</a:t>
+              <a:t>16</a:t>
             </a:fld>
             <a:endParaRPr lang="it-IT" sz="1500" b="1" dirty="0">
               <a:solidFill>
@@ -9922,8 +10999,8 @@
           </a:p>
         </p:txBody>
       </p:sp>
-      <mc:AlternateContent xmlns:mc="http://schemas.openxmlformats.org/markup-compatibility/2006">
-        <mc:Choice xmlns:a14="http://schemas.microsoft.com/office/drawing/2010/main" Requires="a14">
+      <mc:AlternateContent xmlns:mc="http://schemas.openxmlformats.org/markup-compatibility/2006" xmlns:a14="http://schemas.microsoft.com/office/drawing/2010/main">
+        <mc:Choice Requires="a14">
           <p:sp>
             <p:nvSpPr>
               <p:cNvPr id="13" name="CasellaDiTesto 12">
@@ -9959,6 +11036,7 @@
               </a:bodyPr>
               <a:lstStyle/>
               <a:p>
+                <a:pPr/>
                 <a14:m>
                   <m:oMathPara xmlns:m="http://schemas.openxmlformats.org/officeDocument/2006/math">
                     <m:oMathParaPr>
@@ -10024,7 +11102,7 @@
             </p:txBody>
           </p:sp>
         </mc:Choice>
-        <mc:Fallback>
+        <mc:Fallback xmlns="">
           <p:sp>
             <p:nvSpPr>
               <p:cNvPr id="13" name="CasellaDiTesto 12">
@@ -10087,7 +11165,7 @@
 </p:sld>
 </file>
 
-<file path=ppt/slides/slide16.xml><?xml version="1.0" encoding="utf-8"?>
+<file path=ppt/slides/slide17.xml><?xml version="1.0" encoding="utf-8"?>
 <p:sld xmlns:a="http://schemas.openxmlformats.org/drawingml/2006/main" xmlns:r="http://schemas.openxmlformats.org/officeDocument/2006/relationships" xmlns:p="http://schemas.openxmlformats.org/presentationml/2006/main">
   <p:cSld>
     <p:spTree>
@@ -10192,7 +11270,109 @@
                   <a:buFont typeface="Wingdings" panose="05000000000000000000" pitchFamily="2" charset="2"/>
                   <a:buChar char="ü"/>
                 </a:pPr>
-                <a:endParaRPr lang="it-IT" dirty="0"/>
+                <a:r>
+                  <a:rPr lang="it-IT" sz="2500" dirty="0" err="1"/>
+                  <a:t>Improve</a:t>
+                </a:r>
+                <a:r>
+                  <a:rPr lang="it-IT" sz="2500" dirty="0"/>
+                  <a:t> the </a:t>
+                </a:r>
+                <a14:m>
+                  <m:oMath xmlns:m="http://schemas.openxmlformats.org/officeDocument/2006/math">
+                    <m:r>
+                      <m:rPr>
+                        <m:sty m:val="p"/>
+                      </m:rPr>
+                      <a:rPr lang="it-IT" sz="2500" b="0" i="0" smtClean="0">
+                        <a:latin typeface="Cambria Math" panose="02040503050406030204" pitchFamily="18" charset="0"/>
+                      </a:rPr>
+                      <m:t>Δ</m:t>
+                    </m:r>
+                    <m:r>
+                      <a:rPr lang="it-IT" sz="2500" b="0" i="1" smtClean="0">
+                        <a:latin typeface="Cambria Math" panose="02040503050406030204" pitchFamily="18" charset="0"/>
+                      </a:rPr>
+                      <m:t>𝑥</m:t>
+                    </m:r>
+                  </m:oMath>
+                </a14:m>
+                <a:r>
+                  <a:rPr lang="it-IT" sz="2500" dirty="0"/>
+                  <a:t> of </a:t>
+                </a:r>
+                <a:r>
+                  <a:rPr lang="it-IT" sz="2500" dirty="0" err="1"/>
+                  <a:t>spatial</a:t>
+                </a:r>
+                <a:r>
+                  <a:rPr lang="it-IT" sz="2500" dirty="0"/>
+                  <a:t> shift from incoming and </a:t>
+                </a:r>
+                <a:r>
+                  <a:rPr lang="it-IT" sz="2500" dirty="0" err="1"/>
+                  <a:t>outgoing</a:t>
+                </a:r>
+                <a:r>
+                  <a:rPr lang="it-IT" sz="2500" dirty="0"/>
+                  <a:t> </a:t>
+                </a:r>
+                <a:r>
+                  <a:rPr lang="it-IT" sz="2500" dirty="0" err="1"/>
+                  <a:t>fluxes</a:t>
+                </a:r>
+                <a:r>
+                  <a:rPr lang="it-IT" sz="2500" dirty="0"/>
+                  <a:t> of </a:t>
+                </a:r>
+                <a:r>
+                  <a:rPr lang="it-IT" sz="2500" dirty="0" err="1"/>
+                  <a:t>particles</a:t>
+                </a:r>
+                <a:r>
+                  <a:rPr lang="it-IT" sz="2500" dirty="0"/>
+                  <a:t> by </a:t>
+                </a:r>
+                <a:r>
+                  <a:rPr lang="it-IT" sz="2500" dirty="0" err="1"/>
+                  <a:t>knowing</a:t>
+                </a:r>
+                <a:r>
+                  <a:rPr lang="it-IT" sz="2500" dirty="0"/>
+                  <a:t> the </a:t>
+                </a:r>
+                <a:r>
+                  <a:rPr lang="it-IT" sz="2500" dirty="0" err="1"/>
+                  <a:t>distance</a:t>
+                </a:r>
+                <a:r>
+                  <a:rPr lang="it-IT" sz="2500" dirty="0"/>
+                  <a:t> </a:t>
+                </a:r>
+                <a:r>
+                  <a:rPr lang="it-IT" sz="2500" dirty="0" err="1"/>
+                  <a:t>between</a:t>
+                </a:r>
+                <a:r>
+                  <a:rPr lang="it-IT" sz="2500" dirty="0"/>
+                  <a:t> the </a:t>
+                </a:r>
+                <a:r>
+                  <a:rPr lang="it-IT" sz="2500" dirty="0" err="1"/>
+                  <a:t>two</a:t>
+                </a:r>
+                <a:r>
+                  <a:rPr lang="it-IT" sz="2500" dirty="0"/>
+                  <a:t> detectors (in the </a:t>
+                </a:r>
+                <a:r>
+                  <a:rPr lang="it-IT" sz="2500" dirty="0" err="1"/>
+                  <a:t>spatial</a:t>
+                </a:r>
+                <a:r>
+                  <a:rPr lang="it-IT" sz="2500" dirty="0"/>
+                  <a:t> cut)</a:t>
+                </a:r>
               </a:p>
               <a:p>
                 <a:pPr algn="ctr">
@@ -10200,148 +11380,39 @@
                   <a:buChar char="ü"/>
                 </a:pPr>
                 <a:r>
-                  <a:rPr lang="it-IT" dirty="0" err="1"/>
-                  <a:t>Improve</a:t>
-                </a:r>
-                <a:r>
-                  <a:rPr lang="it-IT" dirty="0"/>
-                  <a:t> the </a:t>
-                </a:r>
-                <a14:m>
-                  <m:oMath xmlns:m="http://schemas.openxmlformats.org/officeDocument/2006/math">
-                    <m:r>
-                      <m:rPr>
-                        <m:sty m:val="p"/>
-                      </m:rPr>
-                      <a:rPr lang="it-IT" b="0" i="0" smtClean="0">
-                        <a:latin typeface="Cambria Math" panose="02040503050406030204" pitchFamily="18" charset="0"/>
-                      </a:rPr>
-                      <m:t>Δ</m:t>
-                    </m:r>
-                    <m:r>
-                      <a:rPr lang="it-IT" b="0" i="1" smtClean="0">
-                        <a:latin typeface="Cambria Math" panose="02040503050406030204" pitchFamily="18" charset="0"/>
-                      </a:rPr>
-                      <m:t>𝑥</m:t>
-                    </m:r>
-                  </m:oMath>
-                </a14:m>
-                <a:r>
-                  <a:rPr lang="it-IT" dirty="0"/>
-                  <a:t> of </a:t>
-                </a:r>
-                <a:r>
-                  <a:rPr lang="it-IT" dirty="0" err="1"/>
-                  <a:t>spatial</a:t>
-                </a:r>
-                <a:r>
-                  <a:rPr lang="it-IT" dirty="0"/>
-                  <a:t> shift from incoming and </a:t>
-                </a:r>
-                <a:r>
-                  <a:rPr lang="it-IT" dirty="0" err="1"/>
-                  <a:t>outgoing</a:t>
-                </a:r>
-                <a:r>
-                  <a:rPr lang="it-IT" dirty="0"/>
+                  <a:rPr lang="it-IT" sz="2500" dirty="0"/>
+                  <a:t>Take </a:t>
+                </a:r>
+                <a:r>
+                  <a:rPr lang="it-IT" sz="2500" dirty="0" err="1"/>
+                  <a:t>into</a:t>
+                </a:r>
+                <a:r>
+                  <a:rPr lang="it-IT" sz="2500" dirty="0"/>
+                  <a:t> account the </a:t>
+                </a:r>
+                <a:r>
+                  <a:rPr lang="it-IT" sz="2500" dirty="0" err="1"/>
+                  <a:t>torsion</a:t>
+                </a:r>
+                <a:r>
+                  <a:rPr lang="it-IT" sz="2500" dirty="0"/>
                   <a:t> </a:t>
                 </a:r>
                 <a:r>
-                  <a:rPr lang="it-IT" dirty="0" err="1"/>
-                  <a:t>fluxes</a:t>
-                </a:r>
-                <a:r>
-                  <a:rPr lang="it-IT" dirty="0"/>
-                  <a:t> of </a:t>
-                </a:r>
-                <a:r>
-                  <a:rPr lang="it-IT" dirty="0" err="1"/>
-                  <a:t>particles</a:t>
-                </a:r>
-                <a:r>
-                  <a:rPr lang="it-IT" dirty="0"/>
-                  <a:t> by </a:t>
-                </a:r>
-                <a:r>
-                  <a:rPr lang="it-IT" dirty="0" err="1"/>
-                  <a:t>knowing</a:t>
-                </a:r>
-                <a:r>
-                  <a:rPr lang="it-IT" dirty="0"/>
-                  <a:t> the </a:t>
-                </a:r>
-                <a:r>
-                  <a:rPr lang="it-IT" dirty="0" err="1"/>
-                  <a:t>distance</a:t>
-                </a:r>
-                <a:r>
-                  <a:rPr lang="it-IT" dirty="0"/>
-                  <a:t> </a:t>
-                </a:r>
-                <a:r>
-                  <a:rPr lang="it-IT" dirty="0" err="1"/>
-                  <a:t>between</a:t>
-                </a:r>
-                <a:r>
-                  <a:rPr lang="it-IT" dirty="0"/>
-                  <a:t> the </a:t>
-                </a:r>
-                <a:r>
-                  <a:rPr lang="it-IT" dirty="0" err="1"/>
-                  <a:t>two</a:t>
-                </a:r>
-                <a:r>
-                  <a:rPr lang="it-IT" dirty="0"/>
-                  <a:t> detectors (in the </a:t>
-                </a:r>
-                <a:r>
-                  <a:rPr lang="it-IT" dirty="0" err="1"/>
-                  <a:t>spatial</a:t>
-                </a:r>
-                <a:r>
-                  <a:rPr lang="it-IT" dirty="0"/>
-                  <a:t> cut)</a:t>
-                </a:r>
-              </a:p>
-              <a:p>
-                <a:pPr algn="ctr">
-                  <a:buFont typeface="Wingdings" panose="05000000000000000000" pitchFamily="2" charset="2"/>
-                  <a:buChar char="ü"/>
-                </a:pPr>
-                <a:r>
-                  <a:rPr lang="it-IT" dirty="0"/>
-                  <a:t>Take </a:t>
-                </a:r>
-                <a:r>
-                  <a:rPr lang="it-IT" dirty="0" err="1"/>
-                  <a:t>into</a:t>
-                </a:r>
-                <a:r>
-                  <a:rPr lang="it-IT" dirty="0"/>
-                  <a:t> account the </a:t>
-                </a:r>
-                <a:r>
-                  <a:rPr lang="it-IT" dirty="0" err="1"/>
-                  <a:t>torsion</a:t>
-                </a:r>
-                <a:r>
-                  <a:rPr lang="it-IT" dirty="0"/>
-                  <a:t> </a:t>
-                </a:r>
-                <a:r>
-                  <a:rPr lang="it-IT" dirty="0" err="1"/>
+                  <a:rPr lang="it-IT" sz="2500" dirty="0" err="1"/>
                   <a:t>effect</a:t>
                 </a:r>
                 <a:r>
-                  <a:rPr lang="it-IT" dirty="0"/>
+                  <a:rPr lang="it-IT" sz="2500" dirty="0"/>
                   <a:t> on the </a:t>
                 </a:r>
                 <a:r>
-                  <a:rPr lang="it-IT" dirty="0" err="1"/>
+                  <a:rPr lang="it-IT" sz="2500" dirty="0" err="1"/>
                   <a:t>crystals</a:t>
                 </a:r>
                 <a:r>
-                  <a:rPr lang="it-IT" dirty="0"/>
+                  <a:rPr lang="it-IT" sz="2500" dirty="0"/>
                   <a:t>, computing a </a:t>
                 </a:r>
                 <a14:m>
@@ -10349,14 +11420,14 @@
                     <m:sSub>
                       <m:sSubPr>
                         <m:ctrlPr>
-                          <a:rPr lang="it-IT" b="0" i="1" smtClean="0">
+                          <a:rPr lang="it-IT" sz="2500" b="0" i="1" smtClean="0">
                             <a:latin typeface="Cambria Math" panose="02040503050406030204" pitchFamily="18" charset="0"/>
                           </a:rPr>
                         </m:ctrlPr>
                       </m:sSubPr>
                       <m:e>
                         <m:r>
-                          <a:rPr lang="it-IT" b="0" i="1" smtClean="0">
+                          <a:rPr lang="it-IT" sz="2500" b="0" i="1" smtClean="0">
                             <a:latin typeface="Cambria Math" panose="02040503050406030204" pitchFamily="18" charset="0"/>
                           </a:rPr>
                           <m:t>𝜃</m:t>
@@ -10364,7 +11435,7 @@
                       </m:e>
                       <m:sub>
                         <m:r>
-                          <a:rPr lang="it-IT" b="0" i="1" smtClean="0">
+                          <a:rPr lang="it-IT" sz="2500" b="0" i="1" smtClean="0">
                             <a:latin typeface="Cambria Math" panose="02040503050406030204" pitchFamily="18" charset="0"/>
                           </a:rPr>
                           <m:t>0</m:t>
@@ -10372,31 +11443,31 @@
                       </m:sub>
                     </m:sSub>
                     <m:r>
-                      <a:rPr lang="it-IT" b="0" i="1" smtClean="0">
+                      <a:rPr lang="it-IT" sz="2500" b="0" i="1" smtClean="0">
                         <a:latin typeface="Cambria Math" panose="02040503050406030204" pitchFamily="18" charset="0"/>
                       </a:rPr>
                       <m:t>(</m:t>
                     </m:r>
                     <m:r>
-                      <a:rPr lang="it-IT" b="0" i="1" smtClean="0">
+                      <a:rPr lang="it-IT" sz="2500" b="0" i="1" smtClean="0">
                         <a:latin typeface="Cambria Math" panose="02040503050406030204" pitchFamily="18" charset="0"/>
                       </a:rPr>
                       <m:t>𝑥</m:t>
                     </m:r>
                     <m:r>
-                      <a:rPr lang="it-IT" b="0" i="1" smtClean="0">
+                      <a:rPr lang="it-IT" sz="2500" b="0" i="1" smtClean="0">
                         <a:latin typeface="Cambria Math" panose="02040503050406030204" pitchFamily="18" charset="0"/>
                       </a:rPr>
                       <m:t>,</m:t>
                     </m:r>
                     <m:r>
-                      <a:rPr lang="it-IT" b="0" i="1" smtClean="0">
+                      <a:rPr lang="it-IT" sz="2500" b="0" i="1" smtClean="0">
                         <a:latin typeface="Cambria Math" panose="02040503050406030204" pitchFamily="18" charset="0"/>
                       </a:rPr>
                       <m:t>𝑦</m:t>
                     </m:r>
                     <m:r>
-                      <a:rPr lang="it-IT" b="0" i="1" smtClean="0">
+                      <a:rPr lang="it-IT" sz="2500" b="0" i="1" smtClean="0">
                         <a:latin typeface="Cambria Math" panose="02040503050406030204" pitchFamily="18" charset="0"/>
                       </a:rPr>
                       <m:t>)</m:t>
@@ -10404,30 +11475,30 @@
                   </m:oMath>
                 </a14:m>
                 <a:r>
-                  <a:rPr lang="it-IT" dirty="0"/>
+                  <a:rPr lang="it-IT" sz="2500" dirty="0"/>
                   <a:t> by </a:t>
                 </a:r>
                 <a:r>
-                  <a:rPr lang="it-IT" dirty="0" err="1"/>
+                  <a:rPr lang="it-IT" sz="2500" dirty="0" err="1"/>
                   <a:t>performing</a:t>
                 </a:r>
                 <a:r>
-                  <a:rPr lang="it-IT" dirty="0"/>
+                  <a:rPr lang="it-IT" sz="2500" dirty="0"/>
                   <a:t> a «</a:t>
                 </a:r>
                 <a:r>
-                  <a:rPr lang="it-IT" dirty="0" err="1"/>
+                  <a:rPr lang="it-IT" sz="2500" dirty="0" err="1"/>
                   <a:t>grid</a:t>
                 </a:r>
                 <a:r>
-                  <a:rPr lang="it-IT" dirty="0"/>
+                  <a:rPr lang="it-IT" sz="2500" dirty="0"/>
                   <a:t>» </a:t>
                 </a:r>
                 <a:r>
-                  <a:rPr lang="it-IT" dirty="0" err="1"/>
+                  <a:rPr lang="it-IT" sz="2500" dirty="0" err="1"/>
                   <a:t>analysis</a:t>
                 </a:r>
-                <a:endParaRPr lang="it-IT" dirty="0"/>
+                <a:endParaRPr lang="it-IT" sz="2500" dirty="0"/>
               </a:p>
               <a:p>
                 <a:pPr algn="ctr">
@@ -10435,23 +11506,23 @@
                   <a:buChar char="ü"/>
                 </a:pPr>
                 <a:r>
-                  <a:rPr lang="it-IT" dirty="0"/>
+                  <a:rPr lang="it-IT" sz="2500" dirty="0"/>
                   <a:t>Compute the </a:t>
                 </a:r>
                 <a:r>
-                  <a:rPr lang="it-IT" dirty="0" err="1"/>
+                  <a:rPr lang="it-IT" sz="2500" dirty="0" err="1"/>
                   <a:t>torsion</a:t>
                 </a:r>
                 <a:r>
-                  <a:rPr lang="it-IT" dirty="0"/>
+                  <a:rPr lang="it-IT" sz="2500" dirty="0"/>
                   <a:t> </a:t>
                 </a:r>
                 <a:r>
-                  <a:rPr lang="it-IT" dirty="0" err="1"/>
+                  <a:rPr lang="it-IT" sz="2500" dirty="0" err="1"/>
                   <a:t>contribution</a:t>
                 </a:r>
                 <a:r>
-                  <a:rPr lang="it-IT" dirty="0"/>
+                  <a:rPr lang="it-IT" sz="2500" dirty="0"/>
                   <a:t> </a:t>
                 </a:r>
                 <a14:m>
@@ -10459,14 +11530,14 @@
                     <m:sSub>
                       <m:sSubPr>
                         <m:ctrlPr>
-                          <a:rPr lang="it-IT" b="0" i="1" smtClean="0">
+                          <a:rPr lang="it-IT" sz="2500" b="0" i="1" smtClean="0">
                             <a:latin typeface="Cambria Math" panose="02040503050406030204" pitchFamily="18" charset="0"/>
                           </a:rPr>
                         </m:ctrlPr>
                       </m:sSubPr>
                       <m:e>
                         <m:r>
-                          <a:rPr lang="it-IT" b="0" i="1" smtClean="0">
+                          <a:rPr lang="it-IT" sz="2500" b="0" i="1" smtClean="0">
                             <a:latin typeface="Cambria Math" panose="02040503050406030204" pitchFamily="18" charset="0"/>
                           </a:rPr>
                           <m:t>𝜏</m:t>
@@ -10474,7 +11545,7 @@
                       </m:e>
                       <m:sub>
                         <m:r>
-                          <a:rPr lang="it-IT" b="0" i="1" smtClean="0">
+                          <a:rPr lang="it-IT" sz="2500" b="0" i="1" smtClean="0">
                             <a:latin typeface="Cambria Math" panose="02040503050406030204" pitchFamily="18" charset="0"/>
                           </a:rPr>
                           <m:t>𝑦</m:t>
@@ -10484,87 +11555,91 @@
                   </m:oMath>
                 </a14:m>
                 <a:r>
-                  <a:rPr lang="it-IT" dirty="0"/>
+                  <a:rPr lang="it-IT" sz="2500" dirty="0"/>
                   <a:t>(variation of the </a:t>
                 </a:r>
                 <a:r>
-                  <a:rPr lang="it-IT" dirty="0" err="1"/>
+                  <a:rPr lang="it-IT" sz="2500" dirty="0" err="1"/>
                   <a:t>crystalline</a:t>
                 </a:r>
                 <a:r>
-                  <a:rPr lang="it-IT" dirty="0"/>
+                  <a:rPr lang="it-IT" sz="2500" dirty="0"/>
                   <a:t> </a:t>
                 </a:r>
                 <a:r>
-                  <a:rPr lang="it-IT" dirty="0" err="1"/>
+                  <a:rPr lang="it-IT" sz="2500" dirty="0" err="1"/>
                   <a:t>plane</a:t>
                 </a:r>
                 <a:r>
-                  <a:rPr lang="it-IT" dirty="0"/>
+                  <a:rPr lang="it-IT" sz="2500" dirty="0"/>
                   <a:t> </a:t>
                 </a:r>
                 <a:r>
-                  <a:rPr lang="it-IT" dirty="0" err="1"/>
+                  <a:rPr lang="it-IT" sz="2500" dirty="0" err="1"/>
                   <a:t>orientation</a:t>
                 </a:r>
                 <a:r>
-                  <a:rPr lang="it-IT" dirty="0"/>
+                  <a:rPr lang="it-IT" sz="2500" dirty="0"/>
                   <a:t> </a:t>
                 </a:r>
                 <a:r>
-                  <a:rPr lang="it-IT" dirty="0" err="1"/>
+                  <a:rPr lang="it-IT" sz="2500" dirty="0" err="1"/>
                   <a:t>along</a:t>
                 </a:r>
                 <a:r>
-                  <a:rPr lang="it-IT" dirty="0"/>
+                  <a:rPr lang="it-IT" sz="2500" dirty="0"/>
                   <a:t> the </a:t>
                 </a:r>
                 <a:r>
-                  <a:rPr lang="it-IT" dirty="0" err="1"/>
+                  <a:rPr lang="it-IT" sz="2500" dirty="0" err="1"/>
                   <a:t>direction</a:t>
                 </a:r>
                 <a:r>
-                  <a:rPr lang="it-IT" dirty="0"/>
+                  <a:rPr lang="it-IT" sz="2500" dirty="0"/>
                   <a:t> (</a:t>
                 </a:r>
                 <a14:m>
                   <m:oMath xmlns:m="http://schemas.openxmlformats.org/officeDocument/2006/math">
                     <m:r>
-                      <a:rPr lang="it-IT" i="1"/>
+                      <a:rPr lang="it-IT" sz="2500" i="1">
+                        <a:latin typeface="Cambria Math" panose="02040503050406030204" pitchFamily="18" charset="0"/>
+                      </a:rPr>
                       <m:t>𝑦</m:t>
                     </m:r>
                   </m:oMath>
                 </a14:m>
                 <a:r>
-                  <a:rPr lang="it-IT" dirty="0"/>
+                  <a:rPr lang="it-IT" sz="2500" dirty="0"/>
                   <a:t>) </a:t>
                 </a:r>
                 <a:r>
-                  <a:rPr lang="it-IT" dirty="0" err="1"/>
+                  <a:rPr lang="it-IT" sz="2500" dirty="0" err="1"/>
                   <a:t>perpendicular</a:t>
                 </a:r>
                 <a:r>
-                  <a:rPr lang="it-IT" dirty="0"/>
+                  <a:rPr lang="it-IT" sz="2500" dirty="0"/>
                   <a:t> to the bending </a:t>
                 </a:r>
                 <a:r>
-                  <a:rPr lang="it-IT" dirty="0" err="1"/>
+                  <a:rPr lang="it-IT" sz="2500" dirty="0" err="1"/>
                   <a:t>plane</a:t>
                 </a:r>
                 <a:r>
-                  <a:rPr lang="it-IT" dirty="0"/>
+                  <a:rPr lang="it-IT" sz="2500" dirty="0"/>
                   <a:t> (</a:t>
                 </a:r>
                 <a14:m>
                   <m:oMath xmlns:m="http://schemas.openxmlformats.org/officeDocument/2006/math">
                     <m:r>
-                      <a:rPr lang="it-IT" i="1"/>
+                      <a:rPr lang="it-IT" sz="2500" i="1">
+                        <a:latin typeface="Cambria Math" panose="02040503050406030204" pitchFamily="18" charset="0"/>
+                      </a:rPr>
                       <m:t>𝑥</m:t>
                     </m:r>
                   </m:oMath>
                 </a14:m>
                 <a:r>
-                  <a:rPr lang="it-IT" dirty="0"/>
+                  <a:rPr lang="it-IT" sz="2500" dirty="0"/>
                   <a:t>))</a:t>
                 </a:r>
               </a:p>
@@ -10574,77 +11649,115 @@
                   <a:buChar char="ü"/>
                 </a:pPr>
                 <a:r>
-                  <a:rPr lang="it-IT" dirty="0"/>
+                  <a:rPr lang="it-IT" sz="2500" dirty="0" err="1"/>
+                  <a:t>Removing</a:t>
+                </a:r>
+                <a:r>
+                  <a:rPr lang="it-IT" sz="2500" dirty="0"/>
+                  <a:t> the </a:t>
+                </a:r>
+                <a:r>
+                  <a:rPr lang="it-IT" sz="2500" dirty="0" err="1"/>
+                  <a:t>dechanneling</a:t>
+                </a:r>
+                <a:r>
+                  <a:rPr lang="it-IT" sz="2500" dirty="0"/>
+                  <a:t> background from the </a:t>
+                </a:r>
+                <a:r>
+                  <a:rPr lang="it-IT" sz="2500" dirty="0" err="1"/>
+                  <a:t>deflection</a:t>
+                </a:r>
+                <a:r>
+                  <a:rPr lang="it-IT" sz="2500" dirty="0"/>
                   <a:t> </a:t>
                 </a:r>
                 <a:r>
-                  <a:rPr lang="it-IT" dirty="0" err="1"/>
-                  <a:t>Perform</a:t>
-                </a:r>
-                <a:r>
-                  <a:rPr lang="it-IT" dirty="0"/>
-                  <a:t> the </a:t>
-                </a:r>
-                <a:r>
-                  <a:rPr lang="it-IT" dirty="0" err="1"/>
-                  <a:t>analysis</a:t>
-                </a:r>
-                <a:r>
-                  <a:rPr lang="it-IT" dirty="0"/>
-                  <a:t> for the </a:t>
-                </a:r>
-                <a:r>
-                  <a:rPr lang="it-IT" dirty="0" err="1"/>
-                  <a:t>other</a:t>
-                </a:r>
-                <a:r>
-                  <a:rPr lang="it-IT" dirty="0"/>
-                  <a:t> 4 datasets (for TCCP and TCCPA) </a:t>
-                </a:r>
-                <a:r>
-                  <a:rPr lang="it-IT" dirty="0" err="1"/>
-                  <a:t>also</a:t>
-                </a:r>
-                <a:r>
-                  <a:rPr lang="it-IT" dirty="0"/>
-                  <a:t> using </a:t>
-                </a:r>
-                <a:r>
-                  <a:rPr lang="it-IT" dirty="0" err="1"/>
-                  <a:t>them</a:t>
-                </a:r>
-                <a:r>
-                  <a:rPr lang="it-IT" dirty="0"/>
-                  <a:t> </a:t>
-                </a:r>
-                <a:r>
-                  <a:rPr lang="it-IT" dirty="0" err="1"/>
-                  <a:t>together</a:t>
-                </a:r>
-                <a:r>
-                  <a:rPr lang="it-IT" dirty="0"/>
-                  <a:t> to </a:t>
-                </a:r>
-                <a:r>
-                  <a:rPr lang="it-IT" dirty="0" err="1"/>
-                  <a:t>have</a:t>
-                </a:r>
-                <a:r>
-                  <a:rPr lang="it-IT" dirty="0"/>
-                  <a:t> more </a:t>
-                </a:r>
-                <a:r>
-                  <a:rPr lang="it-IT" dirty="0" err="1"/>
-                  <a:t>statistics</a:t>
-                </a:r>
-                <a:endParaRPr lang="it-IT" dirty="0"/>
+                  <a:rPr lang="it-IT" sz="2500" dirty="0" err="1"/>
+                  <a:t>peak</a:t>
+                </a:r>
+                <a:r>
+                  <a:rPr lang="it-IT" sz="2500" dirty="0"/>
+                  <a:t> (Crystal Ball function?)</a:t>
+                </a:r>
               </a:p>
               <a:p>
                 <a:pPr algn="ctr">
                   <a:buFont typeface="Wingdings" panose="05000000000000000000" pitchFamily="2" charset="2"/>
                   <a:buChar char="ü"/>
                 </a:pPr>
-                <a:endParaRPr lang="it-IT" dirty="0"/>
+                <a:r>
+                  <a:rPr lang="it-IT" sz="2500" dirty="0"/>
+                  <a:t> </a:t>
+                </a:r>
+                <a:r>
+                  <a:rPr lang="it-IT" sz="2500" dirty="0" err="1"/>
+                  <a:t>Perform</a:t>
+                </a:r>
+                <a:r>
+                  <a:rPr lang="it-IT" sz="2500" dirty="0"/>
+                  <a:t> the </a:t>
+                </a:r>
+                <a:r>
+                  <a:rPr lang="it-IT" sz="2500" dirty="0" err="1"/>
+                  <a:t>analysis</a:t>
+                </a:r>
+                <a:r>
+                  <a:rPr lang="it-IT" sz="2500" dirty="0"/>
+                  <a:t> for the </a:t>
+                </a:r>
+                <a:r>
+                  <a:rPr lang="it-IT" sz="2500" dirty="0" err="1"/>
+                  <a:t>other</a:t>
+                </a:r>
+                <a:r>
+                  <a:rPr lang="it-IT" sz="2500" dirty="0"/>
+                  <a:t> 4 datasets (for TCCP and TCCPA) </a:t>
+                </a:r>
+                <a:r>
+                  <a:rPr lang="it-IT" sz="2500" dirty="0" err="1"/>
+                  <a:t>also</a:t>
+                </a:r>
+                <a:r>
+                  <a:rPr lang="it-IT" sz="2500" dirty="0"/>
+                  <a:t> using </a:t>
+                </a:r>
+                <a:r>
+                  <a:rPr lang="it-IT" sz="2500" dirty="0" err="1"/>
+                  <a:t>them</a:t>
+                </a:r>
+                <a:r>
+                  <a:rPr lang="it-IT" sz="2500" dirty="0"/>
+                  <a:t> </a:t>
+                </a:r>
+                <a:r>
+                  <a:rPr lang="it-IT" sz="2500" dirty="0" err="1"/>
+                  <a:t>together</a:t>
+                </a:r>
+                <a:r>
+                  <a:rPr lang="it-IT" sz="2500" dirty="0"/>
+                  <a:t> to </a:t>
+                </a:r>
+                <a:r>
+                  <a:rPr lang="it-IT" sz="2500" dirty="0" err="1"/>
+                  <a:t>have</a:t>
+                </a:r>
+                <a:r>
+                  <a:rPr lang="it-IT" sz="2500" dirty="0"/>
+                  <a:t> more </a:t>
+                </a:r>
+                <a:r>
+                  <a:rPr lang="it-IT" sz="2500" dirty="0" err="1"/>
+                  <a:t>statistics</a:t>
+                </a:r>
+                <a:endParaRPr lang="it-IT" sz="2500" dirty="0"/>
+              </a:p>
+              <a:p>
+                <a:pPr algn="ctr">
+                  <a:buFont typeface="Wingdings" panose="05000000000000000000" pitchFamily="2" charset="2"/>
+                  <a:buChar char="ü"/>
+                </a:pPr>
+                <a:endParaRPr lang="it-IT" sz="2500" dirty="0"/>
               </a:p>
             </p:txBody>
           </p:sp>
@@ -10674,7 +11787,7 @@
               <a:blipFill>
                 <a:blip r:embed="rId3"/>
                 <a:stretch>
-                  <a:fillRect l="-794" r="-1587" b="-1476"/>
+                  <a:fillRect l="-397" t="-1722" r="-1020"/>
                 </a:stretch>
               </a:blipFill>
             </p:spPr>
@@ -10799,7 +11912,7 @@
                   <a:srgbClr val="002060"/>
                 </a:solidFill>
               </a:rPr>
-              <a:t>16</a:t>
+              <a:t>17</a:t>
             </a:fld>
             <a:endParaRPr lang="it-IT" sz="1500" b="1" dirty="0">
               <a:solidFill>
@@ -10887,8 +12000,8 @@
           </a:p>
         </p:txBody>
       </p:sp>
-      <mc:AlternateContent xmlns:mc="http://schemas.openxmlformats.org/markup-compatibility/2006">
-        <mc:Choice xmlns:a14="http://schemas.microsoft.com/office/drawing/2010/main" Requires="a14">
+      <mc:AlternateContent xmlns:mc="http://schemas.openxmlformats.org/markup-compatibility/2006" xmlns:a14="http://schemas.microsoft.com/office/drawing/2010/main">
+        <mc:Choice Requires="a14">
           <p:sp>
             <p:nvSpPr>
               <p:cNvPr id="3" name="Segnaposto contenuto 2">
@@ -11261,7 +12374,7 @@
             </p:txBody>
           </p:sp>
         </mc:Choice>
-        <mc:Fallback>
+        <mc:Fallback xmlns="">
           <p:sp>
             <p:nvSpPr>
               <p:cNvPr id="3" name="Segnaposto contenuto 2">
@@ -11541,8 +12654,8 @@
           <a:chExt cx="0" cy="0"/>
         </a:xfrm>
       </p:grpSpPr>
-      <mc:AlternateContent xmlns:mc="http://schemas.openxmlformats.org/markup-compatibility/2006">
-        <mc:Choice xmlns:a14="http://schemas.microsoft.com/office/drawing/2010/main" Requires="a14">
+      <mc:AlternateContent xmlns:mc="http://schemas.openxmlformats.org/markup-compatibility/2006" xmlns:a14="http://schemas.microsoft.com/office/drawing/2010/main">
+        <mc:Choice Requires="a14">
           <p:sp>
             <p:nvSpPr>
               <p:cNvPr id="2" name="Titolo 1">
@@ -11635,7 +12748,7 @@
             </p:txBody>
           </p:sp>
         </mc:Choice>
-        <mc:Fallback>
+        <mc:Fallback xmlns="">
           <p:sp>
             <p:nvSpPr>
               <p:cNvPr id="2" name="Titolo 1">
@@ -12113,8 +13226,8 @@
           <a:chExt cx="0" cy="0"/>
         </a:xfrm>
       </p:grpSpPr>
-      <mc:AlternateContent xmlns:mc="http://schemas.openxmlformats.org/markup-compatibility/2006">
-        <mc:Choice xmlns:a14="http://schemas.microsoft.com/office/drawing/2010/main" Requires="a14">
+      <mc:AlternateContent xmlns:mc="http://schemas.openxmlformats.org/markup-compatibility/2006" xmlns:a14="http://schemas.microsoft.com/office/drawing/2010/main">
+        <mc:Choice Requires="a14">
           <p:sp>
             <p:nvSpPr>
               <p:cNvPr id="2" name="Titolo 1">
@@ -12207,7 +13320,7 @@
             </p:txBody>
           </p:sp>
         </mc:Choice>
-        <mc:Fallback>
+        <mc:Fallback xmlns="">
           <p:sp>
             <p:nvSpPr>
               <p:cNvPr id="2" name="Titolo 1">
@@ -12719,7 +13832,102 @@
                 </a:r>
                 <a:r>
                   <a:rPr lang="it-IT" dirty="0"/>
-                  <a:t>, </a:t>
+                  <a:t> (</a:t>
+                </a:r>
+                <a:r>
+                  <a:rPr lang="it-IT" dirty="0" err="1"/>
+                  <a:t>because</a:t>
+                </a:r>
+                <a:r>
+                  <a:rPr lang="it-IT" dirty="0"/>
+                  <a:t> </a:t>
+                </a:r>
+                <a14:m>
+                  <m:oMath xmlns:m="http://schemas.openxmlformats.org/officeDocument/2006/math">
+                    <m:sSub>
+                      <m:sSubPr>
+                        <m:ctrlPr>
+                          <a:rPr lang="it-IT" b="0" i="1" smtClean="0">
+                            <a:latin typeface="Cambria Math" panose="02040503050406030204" pitchFamily="18" charset="0"/>
+                          </a:rPr>
+                        </m:ctrlPr>
+                      </m:sSubPr>
+                      <m:e>
+                        <m:r>
+                          <a:rPr lang="it-IT" b="0" i="1" smtClean="0">
+                            <a:latin typeface="Cambria Math" panose="02040503050406030204" pitchFamily="18" charset="0"/>
+                          </a:rPr>
+                          <m:t>𝜃</m:t>
+                        </m:r>
+                      </m:e>
+                      <m:sub>
+                        <m:r>
+                          <a:rPr lang="it-IT" b="0" i="1" smtClean="0">
+                            <a:latin typeface="Cambria Math" panose="02040503050406030204" pitchFamily="18" charset="0"/>
+                          </a:rPr>
+                          <m:t>0</m:t>
+                        </m:r>
+                      </m:sub>
+                    </m:sSub>
+                  </m:oMath>
+                </a14:m>
+                <a:r>
+                  <a:rPr lang="it-IT" dirty="0"/>
+                  <a:t> </a:t>
+                </a:r>
+                <a:r>
+                  <a:rPr lang="it-IT" dirty="0" err="1"/>
+                  <a:t>actually</a:t>
+                </a:r>
+                <a:r>
+                  <a:rPr lang="it-IT" dirty="0"/>
+                  <a:t> </a:t>
+                </a:r>
+                <a:r>
+                  <a:rPr lang="it-IT" dirty="0" err="1"/>
+                  <a:t>depends</a:t>
+                </a:r>
+                <a:r>
+                  <a:rPr lang="it-IT" dirty="0"/>
+                  <a:t> on </a:t>
+                </a:r>
+                <a:r>
+                  <a:rPr lang="it-IT" dirty="0" err="1"/>
+                  <a:t>where</a:t>
+                </a:r>
+                <a:r>
+                  <a:rPr lang="it-IT" dirty="0"/>
+                  <a:t> the </a:t>
+                </a:r>
+                <a:r>
+                  <a:rPr lang="it-IT" dirty="0" err="1"/>
+                  <a:t>particle</a:t>
+                </a:r>
+                <a:r>
+                  <a:rPr lang="it-IT" dirty="0"/>
+                  <a:t> hits the </a:t>
+                </a:r>
+                <a:r>
+                  <a:rPr lang="it-IT" dirty="0" err="1"/>
+                  <a:t>crystal</a:t>
+                </a:r>
+                <a:r>
+                  <a:rPr lang="it-IT" dirty="0"/>
+                  <a:t> in the </a:t>
+                </a:r>
+                <a14:m>
+                  <m:oMath xmlns:m="http://schemas.openxmlformats.org/officeDocument/2006/math">
+                    <m:r>
+                      <a:rPr lang="it-IT" b="0" i="1" smtClean="0">
+                        <a:latin typeface="Cambria Math" panose="02040503050406030204" pitchFamily="18" charset="0"/>
+                      </a:rPr>
+                      <m:t>𝑦</m:t>
+                    </m:r>
+                  </m:oMath>
+                </a14:m>
+                <a:r>
+                  <a:rPr lang="it-IT" dirty="0"/>
+                  <a:t> direction), </a:t>
                 </a:r>
                 <a:r>
                   <a:rPr lang="it-IT" dirty="0" err="1"/>
@@ -12782,7 +13990,7 @@
               <a:blipFill>
                 <a:blip r:embed="rId4"/>
                 <a:stretch>
-                  <a:fillRect l="-1190"/>
+                  <a:fillRect l="-1190" r="-1417"/>
                 </a:stretch>
               </a:blipFill>
             </p:spPr>
@@ -14018,8 +15226,8 @@
           </a:p>
         </p:txBody>
       </p:sp>
-      <mc:AlternateContent xmlns:mc="http://schemas.openxmlformats.org/markup-compatibility/2006">
-        <mc:Choice xmlns:a14="http://schemas.microsoft.com/office/drawing/2010/main" Requires="a14">
+      <mc:AlternateContent xmlns:mc="http://schemas.openxmlformats.org/markup-compatibility/2006" xmlns:a14="http://schemas.microsoft.com/office/drawing/2010/main">
+        <mc:Choice Requires="a14">
           <p:sp>
             <p:nvSpPr>
               <p:cNvPr id="3" name="Segnaposto contenuto 2">
@@ -14286,7 +15494,7 @@
             </p:txBody>
           </p:sp>
         </mc:Choice>
-        <mc:Fallback>
+        <mc:Fallback xmlns="">
           <p:sp>
             <p:nvSpPr>
               <p:cNvPr id="3" name="Segnaposto contenuto 2">

--- a/slides/week2.pptx
+++ b/slides/week2.pptx
@@ -9841,8 +9841,8 @@
           </a:fontRef>
         </p:style>
       </p:cxnSp>
-      <mc:AlternateContent xmlns:mc="http://schemas.openxmlformats.org/markup-compatibility/2006">
-        <mc:Choice xmlns:a14="http://schemas.microsoft.com/office/drawing/2010/main" Requires="a14">
+      <mc:AlternateContent xmlns:mc="http://schemas.openxmlformats.org/markup-compatibility/2006" xmlns:a14="http://schemas.microsoft.com/office/drawing/2010/main">
+        <mc:Choice Requires="a14">
           <p:sp>
             <p:nvSpPr>
               <p:cNvPr id="10" name="Rettangolo con angoli arrotondati 9">
@@ -9986,7 +9986,7 @@
             </p:txBody>
           </p:sp>
         </mc:Choice>
-        <mc:Fallback>
+        <mc:Fallback xmlns="">
           <p:sp>
             <p:nvSpPr>
               <p:cNvPr id="10" name="Rettangolo con angoli arrotondati 9">
@@ -10036,8 +10036,8 @@
           </p:sp>
         </mc:Fallback>
       </mc:AlternateContent>
-      <mc:AlternateContent xmlns:mc="http://schemas.openxmlformats.org/markup-compatibility/2006">
-        <mc:Choice xmlns:a14="http://schemas.microsoft.com/office/drawing/2010/main" Requires="a14">
+      <mc:AlternateContent xmlns:mc="http://schemas.openxmlformats.org/markup-compatibility/2006" xmlns:a14="http://schemas.microsoft.com/office/drawing/2010/main">
+        <mc:Choice Requires="a14">
           <p:sp>
             <p:nvSpPr>
               <p:cNvPr id="11" name="Rettangolo con angoli arrotondati 10">
@@ -10446,7 +10446,7 @@
             </p:txBody>
           </p:sp>
         </mc:Choice>
-        <mc:Fallback>
+        <mc:Fallback xmlns="">
           <p:sp>
             <p:nvSpPr>
               <p:cNvPr id="11" name="Rettangolo con angoli arrotondati 10">
@@ -11556,7 +11556,7 @@
                 </a14:m>
                 <a:r>
                   <a:rPr lang="it-IT" sz="2500" dirty="0"/>
-                  <a:t>(variation of the </a:t>
+                  <a:t> (variation of the </a:t>
                 </a:r>
                 <a:r>
                   <a:rPr lang="it-IT" sz="2500" dirty="0" err="1"/>
@@ -13369,8 +13369,8 @@
           </p:sp>
         </mc:Fallback>
       </mc:AlternateContent>
-      <mc:AlternateContent xmlns:mc="http://schemas.openxmlformats.org/markup-compatibility/2006">
-        <mc:Choice xmlns:a14="http://schemas.microsoft.com/office/drawing/2010/main" Requires="a14">
+      <mc:AlternateContent xmlns:mc="http://schemas.openxmlformats.org/markup-compatibility/2006" xmlns:a14="http://schemas.microsoft.com/office/drawing/2010/main">
+        <mc:Choice Requires="a14">
           <p:sp>
             <p:nvSpPr>
               <p:cNvPr id="3" name="Segnaposto contenuto 2">
@@ -13965,7 +13965,7 @@
             </p:txBody>
           </p:sp>
         </mc:Choice>
-        <mc:Fallback>
+        <mc:Fallback xmlns="">
           <p:sp>
             <p:nvSpPr>
               <p:cNvPr id="3" name="Segnaposto contenuto 2">

--- a/slides/week2.pptx
+++ b/slides/week2.pptx
@@ -213,7 +213,7 @@
           <a:p>
             <a:fld id="{D7A422DF-4847-4D6E-BB97-9B75D56F5D74}" type="datetimeFigureOut">
               <a:rPr lang="it-IT" smtClean="0"/>
-              <a:t>13/07/2026</a:t>
+              <a:t>16/07/2026</a:t>
             </a:fld>
             <a:endParaRPr lang="it-IT"/>
           </a:p>
@@ -3453,7 +3453,7 @@
           <a:p>
             <a:fld id="{4B734174-4AE7-4BE8-A29D-97641C0FB41A}" type="datetimeFigureOut">
               <a:rPr lang="it-IT" smtClean="0"/>
-              <a:t>13/07/2026</a:t>
+              <a:t>16/07/2026</a:t>
             </a:fld>
             <a:endParaRPr lang="it-IT"/>
           </a:p>
@@ -3651,7 +3651,7 @@
           <a:p>
             <a:fld id="{4B734174-4AE7-4BE8-A29D-97641C0FB41A}" type="datetimeFigureOut">
               <a:rPr lang="it-IT" smtClean="0"/>
-              <a:t>13/07/2026</a:t>
+              <a:t>16/07/2026</a:t>
             </a:fld>
             <a:endParaRPr lang="it-IT"/>
           </a:p>
@@ -3859,7 +3859,7 @@
           <a:p>
             <a:fld id="{4B734174-4AE7-4BE8-A29D-97641C0FB41A}" type="datetimeFigureOut">
               <a:rPr lang="it-IT" smtClean="0"/>
-              <a:t>13/07/2026</a:t>
+              <a:t>16/07/2026</a:t>
             </a:fld>
             <a:endParaRPr lang="it-IT"/>
           </a:p>
@@ -4057,7 +4057,7 @@
           <a:p>
             <a:fld id="{4B734174-4AE7-4BE8-A29D-97641C0FB41A}" type="datetimeFigureOut">
               <a:rPr lang="it-IT" smtClean="0"/>
-              <a:t>13/07/2026</a:t>
+              <a:t>16/07/2026</a:t>
             </a:fld>
             <a:endParaRPr lang="it-IT"/>
           </a:p>
@@ -4332,7 +4332,7 @@
           <a:p>
             <a:fld id="{4B734174-4AE7-4BE8-A29D-97641C0FB41A}" type="datetimeFigureOut">
               <a:rPr lang="it-IT" smtClean="0"/>
-              <a:t>13/07/2026</a:t>
+              <a:t>16/07/2026</a:t>
             </a:fld>
             <a:endParaRPr lang="it-IT"/>
           </a:p>
@@ -4597,7 +4597,7 @@
           <a:p>
             <a:fld id="{4B734174-4AE7-4BE8-A29D-97641C0FB41A}" type="datetimeFigureOut">
               <a:rPr lang="it-IT" smtClean="0"/>
-              <a:t>13/07/2026</a:t>
+              <a:t>16/07/2026</a:t>
             </a:fld>
             <a:endParaRPr lang="it-IT"/>
           </a:p>
@@ -5009,7 +5009,7 @@
           <a:p>
             <a:fld id="{4B734174-4AE7-4BE8-A29D-97641C0FB41A}" type="datetimeFigureOut">
               <a:rPr lang="it-IT" smtClean="0"/>
-              <a:t>13/07/2026</a:t>
+              <a:t>16/07/2026</a:t>
             </a:fld>
             <a:endParaRPr lang="it-IT"/>
           </a:p>
@@ -5150,7 +5150,7 @@
           <a:p>
             <a:fld id="{4B734174-4AE7-4BE8-A29D-97641C0FB41A}" type="datetimeFigureOut">
               <a:rPr lang="it-IT" smtClean="0"/>
-              <a:t>13/07/2026</a:t>
+              <a:t>16/07/2026</a:t>
             </a:fld>
             <a:endParaRPr lang="it-IT"/>
           </a:p>
@@ -5263,7 +5263,7 @@
           <a:p>
             <a:fld id="{4B734174-4AE7-4BE8-A29D-97641C0FB41A}" type="datetimeFigureOut">
               <a:rPr lang="it-IT" smtClean="0"/>
-              <a:t>13/07/2026</a:t>
+              <a:t>16/07/2026</a:t>
             </a:fld>
             <a:endParaRPr lang="it-IT"/>
           </a:p>
@@ -5574,7 +5574,7 @@
           <a:p>
             <a:fld id="{4B734174-4AE7-4BE8-A29D-97641C0FB41A}" type="datetimeFigureOut">
               <a:rPr lang="it-IT" smtClean="0"/>
-              <a:t>13/07/2026</a:t>
+              <a:t>16/07/2026</a:t>
             </a:fld>
             <a:endParaRPr lang="it-IT"/>
           </a:p>
@@ -5862,7 +5862,7 @@
           <a:p>
             <a:fld id="{4B734174-4AE7-4BE8-A29D-97641C0FB41A}" type="datetimeFigureOut">
               <a:rPr lang="it-IT" smtClean="0"/>
-              <a:t>13/07/2026</a:t>
+              <a:t>16/07/2026</a:t>
             </a:fld>
             <a:endParaRPr lang="it-IT"/>
           </a:p>
@@ -6103,7 +6103,7 @@
           <a:p>
             <a:fld id="{4B734174-4AE7-4BE8-A29D-97641C0FB41A}" type="datetimeFigureOut">
               <a:rPr lang="it-IT" smtClean="0"/>
-              <a:t>13/07/2026</a:t>
+              <a:t>16/07/2026</a:t>
             </a:fld>
             <a:endParaRPr lang="it-IT"/>
           </a:p>
@@ -11236,8 +11236,8 @@
           </a:p>
         </p:txBody>
       </p:sp>
-      <mc:AlternateContent xmlns:mc="http://schemas.openxmlformats.org/markup-compatibility/2006">
-        <mc:Choice xmlns:a14="http://schemas.microsoft.com/office/drawing/2010/main" Requires="a14">
+      <mc:AlternateContent xmlns:mc="http://schemas.openxmlformats.org/markup-compatibility/2006" xmlns:a14="http://schemas.microsoft.com/office/drawing/2010/main">
+        <mc:Choice Requires="a14">
           <p:sp>
             <p:nvSpPr>
               <p:cNvPr id="3" name="Segnaposto contenuto 2">
@@ -11762,7 +11762,7 @@
             </p:txBody>
           </p:sp>
         </mc:Choice>
-        <mc:Fallback>
+        <mc:Fallback xmlns="">
           <p:sp>
             <p:nvSpPr>
               <p:cNvPr id="3" name="Segnaposto contenuto 2">

--- a/slides/week2.pptx
+++ b/slides/week2.pptx
@@ -213,7 +213,7 @@
           <a:p>
             <a:fld id="{D7A422DF-4847-4D6E-BB97-9B75D56F5D74}" type="datetimeFigureOut">
               <a:rPr lang="it-IT" smtClean="0"/>
-              <a:t>16/07/2026</a:t>
+              <a:t>17/07/2026</a:t>
             </a:fld>
             <a:endParaRPr lang="it-IT"/>
           </a:p>
@@ -3453,7 +3453,7 @@
           <a:p>
             <a:fld id="{4B734174-4AE7-4BE8-A29D-97641C0FB41A}" type="datetimeFigureOut">
               <a:rPr lang="it-IT" smtClean="0"/>
-              <a:t>16/07/2026</a:t>
+              <a:t>17/07/2026</a:t>
             </a:fld>
             <a:endParaRPr lang="it-IT"/>
           </a:p>
@@ -3651,7 +3651,7 @@
           <a:p>
             <a:fld id="{4B734174-4AE7-4BE8-A29D-97641C0FB41A}" type="datetimeFigureOut">
               <a:rPr lang="it-IT" smtClean="0"/>
-              <a:t>16/07/2026</a:t>
+              <a:t>17/07/2026</a:t>
             </a:fld>
             <a:endParaRPr lang="it-IT"/>
           </a:p>
@@ -3859,7 +3859,7 @@
           <a:p>
             <a:fld id="{4B734174-4AE7-4BE8-A29D-97641C0FB41A}" type="datetimeFigureOut">
               <a:rPr lang="it-IT" smtClean="0"/>
-              <a:t>16/07/2026</a:t>
+              <a:t>17/07/2026</a:t>
             </a:fld>
             <a:endParaRPr lang="it-IT"/>
           </a:p>
@@ -4057,7 +4057,7 @@
           <a:p>
             <a:fld id="{4B734174-4AE7-4BE8-A29D-97641C0FB41A}" type="datetimeFigureOut">
               <a:rPr lang="it-IT" smtClean="0"/>
-              <a:t>16/07/2026</a:t>
+              <a:t>17/07/2026</a:t>
             </a:fld>
             <a:endParaRPr lang="it-IT"/>
           </a:p>
@@ -4332,7 +4332,7 @@
           <a:p>
             <a:fld id="{4B734174-4AE7-4BE8-A29D-97641C0FB41A}" type="datetimeFigureOut">
               <a:rPr lang="it-IT" smtClean="0"/>
-              <a:t>16/07/2026</a:t>
+              <a:t>17/07/2026</a:t>
             </a:fld>
             <a:endParaRPr lang="it-IT"/>
           </a:p>
@@ -4597,7 +4597,7 @@
           <a:p>
             <a:fld id="{4B734174-4AE7-4BE8-A29D-97641C0FB41A}" type="datetimeFigureOut">
               <a:rPr lang="it-IT" smtClean="0"/>
-              <a:t>16/07/2026</a:t>
+              <a:t>17/07/2026</a:t>
             </a:fld>
             <a:endParaRPr lang="it-IT"/>
           </a:p>
@@ -5009,7 +5009,7 @@
           <a:p>
             <a:fld id="{4B734174-4AE7-4BE8-A29D-97641C0FB41A}" type="datetimeFigureOut">
               <a:rPr lang="it-IT" smtClean="0"/>
-              <a:t>16/07/2026</a:t>
+              <a:t>17/07/2026</a:t>
             </a:fld>
             <a:endParaRPr lang="it-IT"/>
           </a:p>
@@ -5150,7 +5150,7 @@
           <a:p>
             <a:fld id="{4B734174-4AE7-4BE8-A29D-97641C0FB41A}" type="datetimeFigureOut">
               <a:rPr lang="it-IT" smtClean="0"/>
-              <a:t>16/07/2026</a:t>
+              <a:t>17/07/2026</a:t>
             </a:fld>
             <a:endParaRPr lang="it-IT"/>
           </a:p>
@@ -5263,7 +5263,7 @@
           <a:p>
             <a:fld id="{4B734174-4AE7-4BE8-A29D-97641C0FB41A}" type="datetimeFigureOut">
               <a:rPr lang="it-IT" smtClean="0"/>
-              <a:t>16/07/2026</a:t>
+              <a:t>17/07/2026</a:t>
             </a:fld>
             <a:endParaRPr lang="it-IT"/>
           </a:p>
@@ -5574,7 +5574,7 @@
           <a:p>
             <a:fld id="{4B734174-4AE7-4BE8-A29D-97641C0FB41A}" type="datetimeFigureOut">
               <a:rPr lang="it-IT" smtClean="0"/>
-              <a:t>16/07/2026</a:t>
+              <a:t>17/07/2026</a:t>
             </a:fld>
             <a:endParaRPr lang="it-IT"/>
           </a:p>
@@ -5862,7 +5862,7 @@
           <a:p>
             <a:fld id="{4B734174-4AE7-4BE8-A29D-97641C0FB41A}" type="datetimeFigureOut">
               <a:rPr lang="it-IT" smtClean="0"/>
-              <a:t>16/07/2026</a:t>
+              <a:t>17/07/2026</a:t>
             </a:fld>
             <a:endParaRPr lang="it-IT"/>
           </a:p>
@@ -6103,7 +6103,7 @@
           <a:p>
             <a:fld id="{4B734174-4AE7-4BE8-A29D-97641C0FB41A}" type="datetimeFigureOut">
               <a:rPr lang="it-IT" smtClean="0"/>
-              <a:t>16/07/2026</a:t>
+              <a:t>17/07/2026</a:t>
             </a:fld>
             <a:endParaRPr lang="it-IT"/>
           </a:p>
@@ -6745,8 +6745,8 @@
           </a:p>
         </p:txBody>
       </p:sp>
-      <mc:AlternateContent xmlns:mc="http://schemas.openxmlformats.org/markup-compatibility/2006" xmlns:a14="http://schemas.microsoft.com/office/drawing/2010/main">
-        <mc:Choice Requires="a14">
+      <mc:AlternateContent xmlns:mc="http://schemas.openxmlformats.org/markup-compatibility/2006">
+        <mc:Choice xmlns:a14="http://schemas.microsoft.com/office/drawing/2010/main" Requires="a14">
           <p:sp>
             <p:nvSpPr>
               <p:cNvPr id="3" name="Segnaposto contenuto 2">
@@ -6895,7 +6895,7 @@
                       <a:srgbClr val="FFC000"/>
                     </a:solidFill>
                   </a:rPr>
-                  <a:t> was </a:t>
+                  <a:t> </a:t>
                 </a:r>
                 <a:r>
                   <a:rPr lang="it-IT" dirty="0" err="1">
@@ -6903,7 +6903,71 @@
                       <a:srgbClr val="FFC000"/>
                     </a:solidFill>
                   </a:rPr>
-                  <a:t>found</a:t>
+                  <a:t>might</a:t>
+                </a:r>
+                <a:r>
+                  <a:rPr lang="it-IT" dirty="0">
+                    <a:solidFill>
+                      <a:srgbClr val="FFC000"/>
+                    </a:solidFill>
+                  </a:rPr>
+                  <a:t> not be </a:t>
+                </a:r>
+                <a:r>
+                  <a:rPr lang="it-IT" dirty="0" err="1">
+                    <a:solidFill>
+                      <a:srgbClr val="FFC000"/>
+                    </a:solidFill>
+                  </a:rPr>
+                  <a:t>exact</a:t>
+                </a:r>
+                <a:r>
+                  <a:rPr lang="it-IT" dirty="0">
+                    <a:solidFill>
+                      <a:srgbClr val="FFC000"/>
+                    </a:solidFill>
+                  </a:rPr>
+                  <a:t>! To make the </a:t>
+                </a:r>
+                <a:r>
+                  <a:rPr lang="it-IT" dirty="0" err="1">
+                    <a:solidFill>
+                      <a:srgbClr val="FFC000"/>
+                    </a:solidFill>
+                  </a:rPr>
+                  <a:t>computation</a:t>
+                </a:r>
+                <a:r>
+                  <a:rPr lang="it-IT" dirty="0">
+                    <a:solidFill>
+                      <a:srgbClr val="FFC000"/>
+                    </a:solidFill>
+                  </a:rPr>
+                  <a:t> more accurate we </a:t>
+                </a:r>
+                <a:r>
+                  <a:rPr lang="it-IT" dirty="0" err="1">
+                    <a:solidFill>
+                      <a:srgbClr val="FFC000"/>
+                    </a:solidFill>
+                  </a:rPr>
+                  <a:t>need</a:t>
+                </a:r>
+                <a:r>
+                  <a:rPr lang="it-IT" dirty="0">
+                    <a:solidFill>
+                      <a:srgbClr val="FFC000"/>
+                    </a:solidFill>
+                  </a:rPr>
+                  <a:t> the </a:t>
+                </a:r>
+                <a:r>
+                  <a:rPr lang="it-IT" dirty="0" err="1">
+                    <a:solidFill>
+                      <a:srgbClr val="FFC000"/>
+                    </a:solidFill>
+                  </a:rPr>
+                  <a:t>distance</a:t>
                 </a:r>
                 <a:r>
                   <a:rPr lang="it-IT" dirty="0">
@@ -6919,70 +6983,6 @@
                       <a:srgbClr val="FFC000"/>
                     </a:solidFill>
                   </a:rPr>
-                  <a:t>empirically</a:t>
-                </a:r>
-                <a:r>
-                  <a:rPr lang="it-IT" dirty="0">
-                    <a:solidFill>
-                      <a:srgbClr val="FFC000"/>
-                    </a:solidFill>
-                  </a:rPr>
-                  <a:t>! To make the </a:t>
-                </a:r>
-                <a:r>
-                  <a:rPr lang="it-IT" dirty="0" err="1">
-                    <a:solidFill>
-                      <a:srgbClr val="FFC000"/>
-                    </a:solidFill>
-                  </a:rPr>
-                  <a:t>computation</a:t>
-                </a:r>
-                <a:r>
-                  <a:rPr lang="it-IT" dirty="0">
-                    <a:solidFill>
-                      <a:srgbClr val="FFC000"/>
-                    </a:solidFill>
-                  </a:rPr>
-                  <a:t> more accurate we </a:t>
-                </a:r>
-                <a:r>
-                  <a:rPr lang="it-IT" dirty="0" err="1">
-                    <a:solidFill>
-                      <a:srgbClr val="FFC000"/>
-                    </a:solidFill>
-                  </a:rPr>
-                  <a:t>need</a:t>
-                </a:r>
-                <a:r>
-                  <a:rPr lang="it-IT" dirty="0">
-                    <a:solidFill>
-                      <a:srgbClr val="FFC000"/>
-                    </a:solidFill>
-                  </a:rPr>
-                  <a:t> the </a:t>
-                </a:r>
-                <a:r>
-                  <a:rPr lang="it-IT" dirty="0" err="1">
-                    <a:solidFill>
-                      <a:srgbClr val="FFC000"/>
-                    </a:solidFill>
-                  </a:rPr>
-                  <a:t>distance</a:t>
-                </a:r>
-                <a:r>
-                  <a:rPr lang="it-IT" dirty="0">
-                    <a:solidFill>
-                      <a:srgbClr val="FFC000"/>
-                    </a:solidFill>
-                  </a:rPr>
-                  <a:t> </a:t>
-                </a:r>
-                <a:r>
-                  <a:rPr lang="it-IT" dirty="0" err="1">
-                    <a:solidFill>
-                      <a:srgbClr val="FFC000"/>
-                    </a:solidFill>
-                  </a:rPr>
                   <a:t>between</a:t>
                 </a:r>
                 <a:r>
@@ -7013,7 +7013,7 @@
             </p:txBody>
           </p:sp>
         </mc:Choice>
-        <mc:Fallback xmlns="">
+        <mc:Fallback>
           <p:sp>
             <p:nvSpPr>
               <p:cNvPr id="3" name="Segnaposto contenuto 2">
@@ -7724,8 +7724,8 @@
           </a:p>
         </p:txBody>
       </p:sp>
-      <mc:AlternateContent xmlns:mc="http://schemas.openxmlformats.org/markup-compatibility/2006" xmlns:a14="http://schemas.microsoft.com/office/drawing/2010/main">
-        <mc:Choice Requires="a14">
+      <mc:AlternateContent xmlns:mc="http://schemas.openxmlformats.org/markup-compatibility/2006">
+        <mc:Choice xmlns:a14="http://schemas.microsoft.com/office/drawing/2010/main" Requires="a14">
           <p:sp>
             <p:nvSpPr>
               <p:cNvPr id="3" name="Segnaposto contenuto 2">
@@ -8380,7 +8380,7 @@
                 </a:r>
                 <a:r>
                   <a:rPr lang="it-IT" dirty="0" err="1"/>
-                  <a:t>maximize</a:t>
+                  <a:t>maximizes</a:t>
                 </a:r>
                 <a:r>
                   <a:rPr lang="it-IT" dirty="0"/>
@@ -8426,7 +8426,7 @@
             </p:txBody>
           </p:sp>
         </mc:Choice>
-        <mc:Fallback xmlns="">
+        <mc:Fallback>
           <p:sp>
             <p:nvSpPr>
               <p:cNvPr id="3" name="Segnaposto contenuto 2">
@@ -8706,8 +8706,8 @@
           </a:p>
         </p:txBody>
       </p:sp>
-      <mc:AlternateContent xmlns:mc="http://schemas.openxmlformats.org/markup-compatibility/2006" xmlns:a14="http://schemas.microsoft.com/office/drawing/2010/main">
-        <mc:Choice Requires="a14">
+      <mc:AlternateContent xmlns:mc="http://schemas.openxmlformats.org/markup-compatibility/2006">
+        <mc:Choice xmlns:a14="http://schemas.microsoft.com/office/drawing/2010/main" Requires="a14">
           <p:sp>
             <p:nvSpPr>
               <p:cNvPr id="3" name="Segnaposto contenuto 2">
@@ -8777,14 +8777,6 @@
                 </a:r>
                 <a:r>
                   <a:rPr lang="it-IT" dirty="0" err="1"/>
-                  <a:t>is</a:t>
-                </a:r>
-                <a:r>
-                  <a:rPr lang="it-IT" dirty="0"/>
-                  <a:t> </a:t>
-                </a:r>
-                <a:r>
-                  <a:rPr lang="it-IT" dirty="0" err="1"/>
                   <a:t>fitted</a:t>
                 </a:r>
                 <a:r>
@@ -8860,7 +8852,7 @@
             </p:txBody>
           </p:sp>
         </mc:Choice>
-        <mc:Fallback xmlns="">
+        <mc:Fallback>
           <p:sp>
             <p:nvSpPr>
               <p:cNvPr id="3" name="Segnaposto contenuto 2">
@@ -12874,7 +12866,7 @@
             </a:r>
             <a:r>
               <a:rPr lang="it-IT" dirty="0" err="1"/>
-              <a:t>prevent</a:t>
+              <a:t>preventing</a:t>
             </a:r>
             <a:r>
               <a:rPr lang="it-IT" dirty="0"/>
@@ -12910,13 +12902,8 @@
             </a:r>
             <a:r>
               <a:rPr lang="it-IT" dirty="0"/>
-              <a:t> and </a:t>
-            </a:r>
-            <a:r>
-              <a:rPr lang="it-IT"/>
-              <a:t>delta rays.</a:t>
-            </a:r>
-            <a:endParaRPr lang="it-IT" dirty="0"/>
+              <a:t> and delta rays.</a:t>
+            </a:r>
           </a:p>
           <a:p>
             <a:pPr marL="0" indent="0">
@@ -15226,8 +15213,8 @@
           </a:p>
         </p:txBody>
       </p:sp>
-      <mc:AlternateContent xmlns:mc="http://schemas.openxmlformats.org/markup-compatibility/2006" xmlns:a14="http://schemas.microsoft.com/office/drawing/2010/main">
-        <mc:Choice Requires="a14">
+      <mc:AlternateContent xmlns:mc="http://schemas.openxmlformats.org/markup-compatibility/2006">
+        <mc:Choice xmlns:a14="http://schemas.microsoft.com/office/drawing/2010/main" Requires="a14">
           <p:sp>
             <p:nvSpPr>
               <p:cNvPr id="3" name="Segnaposto contenuto 2">
@@ -15448,7 +15435,7 @@
                 </a:r>
                 <a:r>
                   <a:rPr lang="it-IT" sz="2500" dirty="0"/>
-                  <a:t> width  &amp; </a:t>
+                  <a:t> width &amp; </a:t>
                 </a:r>
                 <a:r>
                   <a:rPr lang="it-IT" sz="2500" dirty="0" err="1"/>
@@ -15494,7 +15481,7 @@
             </p:txBody>
           </p:sp>
         </mc:Choice>
-        <mc:Fallback xmlns="">
+        <mc:Fallback>
           <p:sp>
             <p:nvSpPr>
               <p:cNvPr id="3" name="Segnaposto contenuto 2">
@@ -15519,7 +15506,7 @@
               <a:blipFill>
                 <a:blip r:embed="rId3"/>
                 <a:stretch>
-                  <a:fillRect l="-964"/>
+                  <a:fillRect l="-964" r="-1304"/>
                 </a:stretch>
               </a:blipFill>
             </p:spPr>

--- a/slides/week2.pptx
+++ b/slides/week2.pptx
@@ -6605,8 +6605,29 @@
                   <a:schemeClr val="bg1"/>
                 </a:solidFill>
               </a:rPr>
-              <a:t>for TCCP and TCCPA</a:t>
-            </a:r>
+              <a:t>for long </a:t>
+            </a:r>
+            <a:r>
+              <a:rPr lang="it-IT" b="1" i="1" dirty="0" err="1">
+                <a:solidFill>
+                  <a:schemeClr val="bg1"/>
+                </a:solidFill>
+              </a:rPr>
+              <a:t>crystals</a:t>
+            </a:r>
+            <a:r>
+              <a:rPr lang="it-IT" b="1" i="1">
+                <a:solidFill>
+                  <a:schemeClr val="bg1"/>
+                </a:solidFill>
+              </a:rPr>
+              <a:t> 1 &amp; 2</a:t>
+            </a:r>
+            <a:endParaRPr lang="it-IT" b="1" i="1" dirty="0">
+              <a:solidFill>
+                <a:schemeClr val="bg1"/>
+              </a:solidFill>
+            </a:endParaRPr>
           </a:p>
         </p:txBody>
       </p:sp>
@@ -6745,8 +6766,8 @@
           </a:p>
         </p:txBody>
       </p:sp>
-      <mc:AlternateContent xmlns:mc="http://schemas.openxmlformats.org/markup-compatibility/2006">
-        <mc:Choice xmlns:a14="http://schemas.microsoft.com/office/drawing/2010/main" Requires="a14">
+      <mc:AlternateContent xmlns:mc="http://schemas.openxmlformats.org/markup-compatibility/2006" xmlns:a14="http://schemas.microsoft.com/office/drawing/2010/main">
+        <mc:Choice Requires="a14">
           <p:sp>
             <p:nvSpPr>
               <p:cNvPr id="3" name="Segnaposto contenuto 2">
@@ -7013,7 +7034,7 @@
             </p:txBody>
           </p:sp>
         </mc:Choice>
-        <mc:Fallback>
+        <mc:Fallback xmlns="">
           <p:sp>
             <p:nvSpPr>
               <p:cNvPr id="3" name="Segnaposto contenuto 2">
@@ -7724,8 +7745,8 @@
           </a:p>
         </p:txBody>
       </p:sp>
-      <mc:AlternateContent xmlns:mc="http://schemas.openxmlformats.org/markup-compatibility/2006">
-        <mc:Choice xmlns:a14="http://schemas.microsoft.com/office/drawing/2010/main" Requires="a14">
+      <mc:AlternateContent xmlns:mc="http://schemas.openxmlformats.org/markup-compatibility/2006" xmlns:a14="http://schemas.microsoft.com/office/drawing/2010/main">
+        <mc:Choice Requires="a14">
           <p:sp>
             <p:nvSpPr>
               <p:cNvPr id="3" name="Segnaposto contenuto 2">
@@ -8426,7 +8447,7 @@
             </p:txBody>
           </p:sp>
         </mc:Choice>
-        <mc:Fallback>
+        <mc:Fallback xmlns="">
           <p:sp>
             <p:nvSpPr>
               <p:cNvPr id="3" name="Segnaposto contenuto 2">
@@ -8706,8 +8727,8 @@
           </a:p>
         </p:txBody>
       </p:sp>
-      <mc:AlternateContent xmlns:mc="http://schemas.openxmlformats.org/markup-compatibility/2006">
-        <mc:Choice xmlns:a14="http://schemas.microsoft.com/office/drawing/2010/main" Requires="a14">
+      <mc:AlternateContent xmlns:mc="http://schemas.openxmlformats.org/markup-compatibility/2006" xmlns:a14="http://schemas.microsoft.com/office/drawing/2010/main">
+        <mc:Choice Requires="a14">
           <p:sp>
             <p:nvSpPr>
               <p:cNvPr id="3" name="Segnaposto contenuto 2">
@@ -8852,7 +8873,7 @@
             </p:txBody>
           </p:sp>
         </mc:Choice>
-        <mc:Fallback>
+        <mc:Fallback xmlns="">
           <p:sp>
             <p:nvSpPr>
               <p:cNvPr id="3" name="Segnaposto contenuto 2">
@@ -15213,8 +15234,8 @@
           </a:p>
         </p:txBody>
       </p:sp>
-      <mc:AlternateContent xmlns:mc="http://schemas.openxmlformats.org/markup-compatibility/2006">
-        <mc:Choice xmlns:a14="http://schemas.microsoft.com/office/drawing/2010/main" Requires="a14">
+      <mc:AlternateContent xmlns:mc="http://schemas.openxmlformats.org/markup-compatibility/2006" xmlns:a14="http://schemas.microsoft.com/office/drawing/2010/main">
+        <mc:Choice Requires="a14">
           <p:sp>
             <p:nvSpPr>
               <p:cNvPr id="3" name="Segnaposto contenuto 2">
@@ -15481,7 +15502,7 @@
             </p:txBody>
           </p:sp>
         </mc:Choice>
-        <mc:Fallback>
+        <mc:Fallback xmlns="">
           <p:sp>
             <p:nvSpPr>
               <p:cNvPr id="3" name="Segnaposto contenuto 2">

--- a/slides/week2.pptx
+++ b/slides/week2.pptx
@@ -6616,18 +6616,13 @@
               <a:t>crystals</a:t>
             </a:r>
             <a:r>
-              <a:rPr lang="it-IT" b="1" i="1">
+              <a:rPr lang="it-IT" b="1" i="1" dirty="0">
                 <a:solidFill>
                   <a:schemeClr val="bg1"/>
                 </a:solidFill>
               </a:rPr>
               <a:t> 1 &amp; 2</a:t>
             </a:r>
-            <a:endParaRPr lang="it-IT" b="1" i="1" dirty="0">
-              <a:solidFill>
-                <a:schemeClr val="bg1"/>
-              </a:solidFill>
-            </a:endParaRPr>
           </a:p>
         </p:txBody>
       </p:sp>
